--- a/ppt/samjha.pptx
+++ b/ppt/samjha.pptx
@@ -15,8 +15,6 @@
     <p:sldId id="263" r:id="rId14"/>
     <p:sldId id="264" r:id="rId15"/>
     <p:sldId id="265" r:id="rId16"/>
-    <p:sldId id="266" r:id="rId17"/>
-    <p:sldId id="267" r:id="rId18"/>
   </p:sldIdLst>
   <p:sldSz cx="12191695" cy="6858000" type="screen4x3"/>
   <p:notesSz cx="6858000" cy="9144000"/>
@@ -3115,7 +3113,7 @@
         </p:nvSpPr>
         <p:spPr>
           <a:xfrm>
-            <a:off x="822960" y="1920240"/>
+            <a:off x="822960" y="2011680"/>
             <a:ext cx="10058400" cy="1188720"/>
           </a:xfrm>
           <a:prstGeom prst="rect">
@@ -3157,7 +3155,7 @@
         </p:nvSpPr>
         <p:spPr>
           <a:xfrm>
-            <a:off x="822960" y="3063240"/>
+            <a:off x="822960" y="3154680"/>
             <a:ext cx="5486400" cy="731520"/>
           </a:xfrm>
           <a:prstGeom prst="rect">
@@ -3193,55 +3191,13 @@
       </p:sp>
       <p:sp>
         <p:nvSpPr>
-          <p:cNvPr id="4" name="TextBox 3"/>
-          <p:cNvSpPr txBox="1"/>
-          <p:nvPr/>
-        </p:nvSpPr>
-        <p:spPr>
-          <a:xfrm>
-            <a:off x="868680" y="3977639"/>
-            <a:ext cx="10058400" cy="457200"/>
-          </a:xfrm>
-          <a:prstGeom prst="rect">
-            <a:avLst/>
-          </a:prstGeom>
-          <a:noFill/>
-        </p:spPr>
-        <p:txBody>
-          <a:bodyPr wrap="square" lIns="0" rIns="0" tIns="0" bIns="0">
-            <a:spAutoFit/>
-          </a:bodyPr>
-          <a:lstStyle/>
-          <a:p>
-            <a:pPr algn="l">
-              <a:lnSpc>
-                <a:spcPct val="125000"/>
-              </a:lnSpc>
-              <a:spcAft>
-                <a:spcPts val="600"/>
-              </a:spcAft>
-            </a:pPr>
-            <a:r>
-              <a:rPr sz="2200" b="0">
-                <a:solidFill>
-                  <a:srgbClr val="98A1B6"/>
-                </a:solidFill>
-                <a:latin typeface="Helvetica Neue"/>
-              </a:rPr>
-              <a:t>Voice-native informed consent for Indian retail lending</a:t>
-            </a:r>
-          </a:p>
-        </p:txBody>
-      </p:sp>
-      <p:sp>
-        <p:nvSpPr>
-          <p:cNvPr id="5" name="Rectangle 4"/>
+          <p:cNvPr id="4" name="Rectangle 3"/>
           <p:cNvSpPr/>
           <p:nvPr/>
         </p:nvSpPr>
         <p:spPr>
           <a:xfrm>
-            <a:off x="868680" y="4663440"/>
+            <a:off x="868680" y="4160520"/>
             <a:ext cx="2011680" cy="19050"/>
           </a:xfrm>
           <a:prstGeom prst="rect">
@@ -3279,14 +3235,14 @@
       </p:sp>
       <p:sp>
         <p:nvSpPr>
-          <p:cNvPr id="6" name="TextBox 5"/>
+          <p:cNvPr id="5" name="TextBox 4"/>
           <p:cNvSpPr txBox="1"/>
           <p:nvPr/>
         </p:nvSpPr>
         <p:spPr>
           <a:xfrm>
-            <a:off x="868680" y="4937760"/>
-            <a:ext cx="10058400" cy="914400"/>
+            <a:off x="868680" y="4480560"/>
+            <a:ext cx="10058400" cy="1280160"/>
           </a:xfrm>
           <a:prstGeom prst="rect">
             <a:avLst/>
@@ -3301,52 +3257,52 @@
           <a:p>
             <a:pPr algn="l">
               <a:lnSpc>
-                <a:spcPct val="125000"/>
+                <a:spcPct val="130000"/>
               </a:lnSpc>
               <a:spcAft>
                 <a:spcPts val="600"/>
               </a:spcAft>
             </a:pPr>
             <a:r>
-              <a:rPr sz="1700" b="0">
+              <a:rPr sz="2800" b="0">
                 <a:solidFill>
                   <a:srgbClr val="F2F5FB"/>
                 </a:solidFill>
                 <a:latin typeface="Helvetica Neue"/>
               </a:rPr>
-              <a:t>RBI Key Facts Statement, read aloud in Hindi, clause by clause —</a:t>
+              <a:t>She cannot read the loan document.</a:t>
             </a:r>
           </a:p>
           <a:p>
             <a:pPr algn="l">
               <a:lnSpc>
-                <a:spcPct val="125000"/>
+                <a:spcPct val="130000"/>
               </a:lnSpc>
               <a:spcAft>
                 <a:spcPts val="600"/>
               </a:spcAft>
             </a:pPr>
             <a:r>
-              <a:rPr sz="1700" b="0">
+              <a:rPr sz="2800" b="0">
                 <a:solidFill>
                   <a:srgbClr val="F2F5FB"/>
                 </a:solidFill>
                 <a:latin typeface="Helvetica Neue"/>
               </a:rPr>
-              <a:t>with proof of what she actually heard.</a:t>
-            </a:r>
-          </a:p>
-        </p:txBody>
-      </p:sp>
-      <p:sp>
-        <p:nvSpPr>
-          <p:cNvPr id="7" name="TextBox 6"/>
+              <a:t>So we prove what she heard.</a:t>
+            </a:r>
+          </a:p>
+        </p:txBody>
+      </p:sp>
+      <p:sp>
+        <p:nvSpPr>
+          <p:cNvPr id="6" name="TextBox 5"/>
           <p:cNvSpPr txBox="1"/>
           <p:nvPr/>
         </p:nvSpPr>
         <p:spPr>
           <a:xfrm>
-            <a:off x="868680" y="6035040"/>
+            <a:off x="868680" y="6080760"/>
             <a:ext cx="10058400" cy="365760"/>
           </a:xfrm>
           <a:prstGeom prst="rect">
@@ -3414,8 +3370,8 @@
         </p:nvSpPr>
         <p:spPr>
           <a:xfrm>
-            <a:off x="731520" y="502920"/>
-            <a:ext cx="10058400" cy="274320"/>
+            <a:off x="914400" y="1737360"/>
+            <a:ext cx="10332720" cy="1828800"/>
           </a:xfrm>
           <a:prstGeom prst="rect">
             <a:avLst/>
@@ -3437,38 +3393,15 @@
               </a:spcAft>
             </a:pPr>
             <a:r>
-              <a:rPr sz="1200" b="0">
-                <a:solidFill>
-                  <a:srgbClr val="98A1B6"/>
+              <a:rPr sz="4000" b="1">
+                <a:solidFill>
+                  <a:srgbClr val="F2F5FB"/>
                 </a:solidFill>
                 <a:latin typeface="Helvetica Neue"/>
               </a:rPr>
-              <a:t>WHAT WE DO NOT CLAIM</a:t>
-            </a:r>
-          </a:p>
-        </p:txBody>
-      </p:sp>
-      <p:sp>
-        <p:nvSpPr>
-          <p:cNvPr id="3" name="TextBox 2"/>
-          <p:cNvSpPr txBox="1"/>
-          <p:nvPr/>
-        </p:nvSpPr>
-        <p:spPr>
-          <a:xfrm>
-            <a:off x="731520" y="822960"/>
-            <a:ext cx="10698480" cy="822960"/>
-          </a:xfrm>
-          <a:prstGeom prst="rect">
-            <a:avLst/>
-          </a:prstGeom>
-          <a:noFill/>
-        </p:spPr>
-        <p:txBody>
-          <a:bodyPr wrap="square" lIns="0" rIns="0" tIns="0" bIns="0">
-            <a:spAutoFit/>
-          </a:bodyPr>
-          <a:lstStyle/>
+              <a:t>Remove speech and the product</a:t>
+            </a:r>
+          </a:p>
           <a:p>
             <a:pPr algn="l">
               <a:lnSpc>
@@ -3479,27 +3412,27 @@
               </a:spcAft>
             </a:pPr>
             <a:r>
-              <a:rPr sz="3200" b="1">
-                <a:solidFill>
-                  <a:srgbClr val="FFB020"/>
+              <a:rPr sz="4000" b="1">
+                <a:solidFill>
+                  <a:srgbClr val="F2F5FB"/>
                 </a:solidFill>
                 <a:latin typeface="Helvetica Neue"/>
               </a:rPr>
-              <a:t>Stated before the results, not after.</a:t>
-            </a:r>
-          </a:p>
-        </p:txBody>
-      </p:sp>
-      <p:sp>
-        <p:nvSpPr>
-          <p:cNvPr id="4" name="Rectangle 3"/>
+              <a:t>does not degrade — it ceases to exist.</a:t>
+            </a:r>
+          </a:p>
+        </p:txBody>
+      </p:sp>
+      <p:sp>
+        <p:nvSpPr>
+          <p:cNvPr id="3" name="Rectangle 2"/>
           <p:cNvSpPr/>
           <p:nvPr/>
         </p:nvSpPr>
         <p:spPr>
           <a:xfrm>
-            <a:off x="731520" y="1572768"/>
-            <a:ext cx="1463040" cy="19050"/>
+            <a:off x="960120" y="3794760"/>
+            <a:ext cx="2011680" cy="19050"/>
           </a:xfrm>
           <a:prstGeom prst="rect">
             <a:avLst/>
@@ -3536,14 +3469,14 @@
       </p:sp>
       <p:sp>
         <p:nvSpPr>
-          <p:cNvPr id="5" name="TextBox 4"/>
+          <p:cNvPr id="4" name="TextBox 3"/>
           <p:cNvSpPr txBox="1"/>
           <p:nvPr/>
         </p:nvSpPr>
         <p:spPr>
           <a:xfrm>
-            <a:off x="731520" y="1965960"/>
-            <a:ext cx="10881360" cy="576072"/>
+            <a:off x="960120" y="4114800"/>
+            <a:ext cx="10332720" cy="1371600"/>
           </a:xfrm>
           <a:prstGeom prst="rect">
             <a:avLst/>
@@ -3558,34 +3491,72 @@
           <a:p>
             <a:pPr algn="l">
               <a:lnSpc>
-                <a:spcPct val="125000"/>
+                <a:spcPct val="150000"/>
               </a:lnSpc>
               <a:spcAft>
                 <a:spcPts val="600"/>
               </a:spcAft>
             </a:pPr>
             <a:r>
-              <a:rPr sz="1400" b="0">
-                <a:solidFill>
-                  <a:srgbClr val="98A1B6"/>
-                </a:solidFill>
-                <a:latin typeface="Helvetica Neue"/>
-              </a:rPr>
-              <a:t>·  The telephone channel is SIMULATED. No live PSTN leg has been validated.</a:t>
-            </a:r>
-          </a:p>
-        </p:txBody>
-      </p:sp>
-      <p:sp>
-        <p:nvSpPr>
-          <p:cNvPr id="6" name="TextBox 5"/>
+              <a:rPr sz="1600" b="0">
+                <a:solidFill>
+                  <a:srgbClr val="F2F5FB"/>
+                </a:solidFill>
+                <a:latin typeface="Menlo"/>
+              </a:rPr>
+              <a:t>uv sync  &amp;&amp;  make test        # 421 tests, no key needed</a:t>
+            </a:r>
+          </a:p>
+          <a:p>
+            <a:pPr algn="l">
+              <a:lnSpc>
+                <a:spcPct val="150000"/>
+              </a:lnSpc>
+              <a:spcAft>
+                <a:spcPts val="600"/>
+              </a:spcAft>
+            </a:pPr>
+            <a:r>
+              <a:rPr sz="1600" b="0">
+                <a:solidFill>
+                  <a:srgbClr val="F2F5FB"/>
+                </a:solidFill>
+                <a:latin typeface="Menlo"/>
+              </a:rPr>
+              <a:t>make stage                    # GO / NO-GO before a live call</a:t>
+            </a:r>
+          </a:p>
+          <a:p>
+            <a:pPr algn="l">
+              <a:lnSpc>
+                <a:spcPct val="150000"/>
+              </a:lnSpc>
+              <a:spcAft>
+                <a:spcPts val="600"/>
+              </a:spcAft>
+            </a:pPr>
+            <a:r>
+              <a:rPr sz="1600" b="0">
+                <a:solidFill>
+                  <a:srgbClr val="F2F5FB"/>
+                </a:solidFill>
+                <a:latin typeface="Menlo"/>
+              </a:rPr>
+              <a:t>make e2e ARGS="--drive"       # upload → Rime → FSM → assert the record</a:t>
+            </a:r>
+          </a:p>
+        </p:txBody>
+      </p:sp>
+      <p:sp>
+        <p:nvSpPr>
+          <p:cNvPr id="5" name="TextBox 4"/>
           <p:cNvSpPr txBox="1"/>
           <p:nvPr/>
         </p:nvSpPr>
         <p:spPr>
           <a:xfrm>
-            <a:off x="731520" y="2542032"/>
-            <a:ext cx="10881360" cy="576072"/>
+            <a:off x="960120" y="5897880"/>
+            <a:ext cx="10332720" cy="457200"/>
           </a:xfrm>
           <a:prstGeom prst="rect">
             <a:avLst/>
@@ -3600,7 +3571,7 @@
           <a:p>
             <a:pPr algn="l">
               <a:lnSpc>
-                <a:spcPct val="125000"/>
+                <a:spcPct val="120000"/>
               </a:lnSpc>
               <a:spcAft>
                 <a:spcPts val="600"/>
@@ -3613,837 +3584,7 @@
                 </a:solidFill>
                 <a:latin typeface="Helvetica Neue"/>
               </a:rPr>
-              <a:t>·  “Heard” means played out of the speaker, ± the client jitter buffer. We measure playout, not cognition.</a:t>
-            </a:r>
-          </a:p>
-        </p:txBody>
-      </p:sp>
-      <p:sp>
-        <p:nvSpPr>
-          <p:cNvPr id="7" name="TextBox 6"/>
-          <p:cNvSpPr txBox="1"/>
-          <p:nvPr/>
-        </p:nvSpPr>
-        <p:spPr>
-          <a:xfrm>
-            <a:off x="731520" y="3118104"/>
-            <a:ext cx="10881360" cy="576072"/>
-          </a:xfrm>
-          <a:prstGeom prst="rect">
-            <a:avLst/>
-          </a:prstGeom>
-          <a:noFill/>
-        </p:spPr>
-        <p:txBody>
-          <a:bodyPr wrap="square" lIns="0" rIns="0" tIns="0" bIns="0">
-            <a:spAutoFit/>
-          </a:bodyPr>
-          <a:lstStyle/>
-          <a:p>
-            <a:pPr algn="l">
-              <a:lnSpc>
-                <a:spcPct val="125000"/>
-              </a:lnSpc>
-              <a:spcAft>
-                <a:spcPts val="600"/>
-              </a:spcAft>
-            </a:pPr>
-            <a:r>
-              <a:rPr sz="1400" b="0">
-                <a:solidFill>
-                  <a:srgbClr val="98A1B6"/>
-                </a:solidFill>
-                <a:latin typeface="Helvetica Neue"/>
-              </a:rPr>
-              <a:t>·  Hindi only, and it cannot currently be otherwise — Coda is the only Rime model with Hindi at all.</a:t>
-            </a:r>
-          </a:p>
-        </p:txBody>
-      </p:sp>
-      <p:sp>
-        <p:nvSpPr>
-          <p:cNvPr id="8" name="TextBox 7"/>
-          <p:cNvSpPr txBox="1"/>
-          <p:nvPr/>
-        </p:nvSpPr>
-        <p:spPr>
-          <a:xfrm>
-            <a:off x="731520" y="3694176"/>
-            <a:ext cx="10881360" cy="576072"/>
-          </a:xfrm>
-          <a:prstGeom prst="rect">
-            <a:avLst/>
-          </a:prstGeom>
-          <a:noFill/>
-        </p:spPr>
-        <p:txBody>
-          <a:bodyPr wrap="square" lIns="0" rIns="0" tIns="0" bIns="0">
-            <a:spAutoFit/>
-          </a:bodyPr>
-          <a:lstStyle/>
-          <a:p>
-            <a:pPr algn="l">
-              <a:lnSpc>
-                <a:spcPct val="125000"/>
-              </a:lnSpc>
-              <a:spcAft>
-                <a:spcPts val="600"/>
-              </a:spcAft>
-            </a:pPr>
-            <a:r>
-              <a:rPr sz="1400" b="0">
-                <a:solidFill>
-                  <a:srgbClr val="98A1B6"/>
-                </a:solidFill>
-                <a:latin typeface="Helvetica Neue"/>
-              </a:rPr>
-              <a:t>·  Document upload reads TABLES, not pictures. A photographed KFS is refused, not guessed at.</a:t>
-            </a:r>
-          </a:p>
-        </p:txBody>
-      </p:sp>
-      <p:sp>
-        <p:nvSpPr>
-          <p:cNvPr id="9" name="TextBox 8"/>
-          <p:cNvSpPr txBox="1"/>
-          <p:nvPr/>
-        </p:nvSpPr>
-        <p:spPr>
-          <a:xfrm>
-            <a:off x="731520" y="4270248"/>
-            <a:ext cx="10881360" cy="576072"/>
-          </a:xfrm>
-          <a:prstGeom prst="rect">
-            <a:avLst/>
-          </a:prstGeom>
-          <a:noFill/>
-        </p:spPr>
-        <p:txBody>
-          <a:bodyPr wrap="square" lIns="0" rIns="0" tIns="0" bIns="0">
-            <a:spAutoFit/>
-          </a:bodyPr>
-          <a:lstStyle/>
-          <a:p>
-            <a:pPr algn="l">
-              <a:lnSpc>
-                <a:spcPct val="125000"/>
-              </a:lnSpc>
-              <a:spcAft>
-                <a:spcPts val="600"/>
-              </a:spcAft>
-            </a:pPr>
-            <a:r>
-              <a:rPr sz="1400" b="0">
-                <a:solidFill>
-                  <a:srgbClr val="98A1B6"/>
-                </a:solidFill>
-                <a:latin typeface="Helvetica Neue"/>
-              </a:rPr>
-              <a:t>·  The synonym table that absorbs a lender's wording is a hypothesis — there is no real lender's KFS in this repo to test it against.</a:t>
-            </a:r>
-          </a:p>
-        </p:txBody>
-      </p:sp>
-      <p:sp>
-        <p:nvSpPr>
-          <p:cNvPr id="10" name="TextBox 9"/>
-          <p:cNvSpPr txBox="1"/>
-          <p:nvPr/>
-        </p:nvSpPr>
-        <p:spPr>
-          <a:xfrm>
-            <a:off x="731520" y="4846320"/>
-            <a:ext cx="10881360" cy="576072"/>
-          </a:xfrm>
-          <a:prstGeom prst="rect">
-            <a:avLst/>
-          </a:prstGeom>
-          <a:noFill/>
-        </p:spPr>
-        <p:txBody>
-          <a:bodyPr wrap="square" lIns="0" rIns="0" tIns="0" bIns="0">
-            <a:spAutoFit/>
-          </a:bodyPr>
-          <a:lstStyle/>
-          <a:p>
-            <a:pPr algn="l">
-              <a:lnSpc>
-                <a:spcPct val="125000"/>
-              </a:lnSpc>
-              <a:spcAft>
-                <a:spcPts val="600"/>
-              </a:spcAft>
-            </a:pPr>
-            <a:r>
-              <a:rPr sz="1400" b="0">
-                <a:solidFill>
-                  <a:srgbClr val="98A1B6"/>
-                </a:solidFill>
-                <a:latin typeface="Helvetica Neue"/>
-              </a:rPr>
-              <a:t>·  No authentication. A call link is a bearer capability.</a:t>
-            </a:r>
-          </a:p>
-        </p:txBody>
-      </p:sp>
-      <p:sp>
-        <p:nvSpPr>
-          <p:cNvPr id="11" name="TextBox 10"/>
-          <p:cNvSpPr txBox="1"/>
-          <p:nvPr/>
-        </p:nvSpPr>
-        <p:spPr>
-          <a:xfrm>
-            <a:off x="731520" y="5422392"/>
-            <a:ext cx="10881360" cy="576072"/>
-          </a:xfrm>
-          <a:prstGeom prst="rect">
-            <a:avLst/>
-          </a:prstGeom>
-          <a:noFill/>
-        </p:spPr>
-        <p:txBody>
-          <a:bodyPr wrap="square" lIns="0" rIns="0" tIns="0" bIns="0">
-            <a:spAutoFit/>
-          </a:bodyPr>
-          <a:lstStyle/>
-          <a:p>
-            <a:pPr algn="l">
-              <a:lnSpc>
-                <a:spcPct val="125000"/>
-              </a:lnSpc>
-              <a:spcAft>
-                <a:spcPts val="600"/>
-              </a:spcAft>
-            </a:pPr>
-            <a:r>
-              <a:rPr sz="1400" b="0">
-                <a:solidFill>
-                  <a:srgbClr val="98A1B6"/>
-                </a:solidFill>
-                <a:latin typeface="Helvetica Neue"/>
-              </a:rPr>
-              <a:t>·  n = 24 on the published eval; the human listening panel has not been run.</a:t>
-            </a:r>
-          </a:p>
-        </p:txBody>
-      </p:sp>
-    </p:spTree>
-  </p:cSld>
-  <p:clrMapOvr>
-    <a:masterClrMapping/>
-  </p:clrMapOvr>
-</p:sld>
-</file>
-
-<file path=ppt/slides/slide11.xml><?xml version="1.0" encoding="utf-8"?>
-<p:sld xmlns:a="http://schemas.openxmlformats.org/drawingml/2006/main" xmlns:p="http://schemas.openxmlformats.org/presentationml/2006/main" xmlns:r="http://schemas.openxmlformats.org/officeDocument/2006/relationships">
-  <p:cSld>
-    <p:bg>
-      <p:bgPr>
-        <a:solidFill>
-          <a:srgbClr val="0B0D12"/>
-        </a:solidFill>
-        <a:effectLst/>
-      </p:bgPr>
-    </p:bg>
-    <p:spTree>
-      <p:nvGrpSpPr>
-        <p:cNvPr id="1" name=""/>
-        <p:cNvGrpSpPr/>
-        <p:nvPr/>
-      </p:nvGrpSpPr>
-      <p:grpSpPr/>
-      <p:sp>
-        <p:nvSpPr>
-          <p:cNvPr id="2" name="TextBox 1"/>
-          <p:cNvSpPr txBox="1"/>
-          <p:nvPr/>
-        </p:nvSpPr>
-        <p:spPr>
-          <a:xfrm>
-            <a:off x="731520" y="502920"/>
-            <a:ext cx="10058400" cy="274320"/>
-          </a:xfrm>
-          <a:prstGeom prst="rect">
-            <a:avLst/>
-          </a:prstGeom>
-          <a:noFill/>
-        </p:spPr>
-        <p:txBody>
-          <a:bodyPr wrap="square" lIns="0" rIns="0" tIns="0" bIns="0">
-            <a:spAutoFit/>
-          </a:bodyPr>
-          <a:lstStyle/>
-          <a:p>
-            <a:pPr algn="l">
-              <a:lnSpc>
-                <a:spcPct val="125000"/>
-              </a:lnSpc>
-              <a:spcAft>
-                <a:spcPts val="600"/>
-              </a:spcAft>
-            </a:pPr>
-            <a:r>
-              <a:rPr sz="1200" b="0">
-                <a:solidFill>
-                  <a:srgbClr val="98A1B6"/>
-                </a:solidFill>
-                <a:latin typeface="Helvetica Neue"/>
-              </a:rPr>
-              <a:t>RUN IT</a:t>
-            </a:r>
-          </a:p>
-        </p:txBody>
-      </p:sp>
-      <p:sp>
-        <p:nvSpPr>
-          <p:cNvPr id="3" name="TextBox 2"/>
-          <p:cNvSpPr txBox="1"/>
-          <p:nvPr/>
-        </p:nvSpPr>
-        <p:spPr>
-          <a:xfrm>
-            <a:off x="731520" y="822960"/>
-            <a:ext cx="10698480" cy="822960"/>
-          </a:xfrm>
-          <a:prstGeom prst="rect">
-            <a:avLst/>
-          </a:prstGeom>
-          <a:noFill/>
-        </p:spPr>
-        <p:txBody>
-          <a:bodyPr wrap="square" lIns="0" rIns="0" tIns="0" bIns="0">
-            <a:spAutoFit/>
-          </a:bodyPr>
-          <a:lstStyle/>
-          <a:p>
-            <a:pPr algn="l">
-              <a:lnSpc>
-                <a:spcPct val="125000"/>
-              </a:lnSpc>
-              <a:spcAft>
-                <a:spcPts val="600"/>
-              </a:spcAft>
-            </a:pPr>
-            <a:r>
-              <a:rPr sz="3200" b="1">
-                <a:solidFill>
-                  <a:srgbClr val="F2F5FB"/>
-                </a:solidFill>
-                <a:latin typeface="Helvetica Neue"/>
-              </a:rPr>
-              <a:t>421 tests, and none of the first four need a key.</a:t>
-            </a:r>
-          </a:p>
-        </p:txBody>
-      </p:sp>
-      <p:sp>
-        <p:nvSpPr>
-          <p:cNvPr id="4" name="Rectangle 3"/>
-          <p:cNvSpPr/>
-          <p:nvPr/>
-        </p:nvSpPr>
-        <p:spPr>
-          <a:xfrm>
-            <a:off x="731520" y="1572768"/>
-            <a:ext cx="1463040" cy="19050"/>
-          </a:xfrm>
-          <a:prstGeom prst="rect">
-            <a:avLst/>
-          </a:prstGeom>
-          <a:solidFill>
-            <a:srgbClr val="1DB954"/>
-          </a:solidFill>
-          <a:ln>
-            <a:noFill/>
-          </a:ln>
-          <a:effectLst/>
-        </p:spPr>
-        <p:style>
-          <a:lnRef idx="1">
-            <a:schemeClr val="accent1"/>
-          </a:lnRef>
-          <a:fillRef idx="3">
-            <a:schemeClr val="accent1"/>
-          </a:fillRef>
-          <a:effectRef idx="2">
-            <a:schemeClr val="accent1"/>
-          </a:effectRef>
-          <a:fontRef idx="minor">
-            <a:schemeClr val="lt1"/>
-          </a:fontRef>
-        </p:style>
-        <p:txBody>
-          <a:bodyPr rtlCol="0" anchor="ctr"/>
-          <a:lstStyle/>
-          <a:p>
-            <a:pPr algn="ctr"/>
-          </a:p>
-        </p:txBody>
-      </p:sp>
-      <p:sp>
-        <p:nvSpPr>
-          <p:cNvPr id="5" name="TextBox 4"/>
-          <p:cNvSpPr txBox="1"/>
-          <p:nvPr/>
-        </p:nvSpPr>
-        <p:spPr>
-          <a:xfrm>
-            <a:off x="731520" y="1965960"/>
-            <a:ext cx="10881360" cy="3840480"/>
-          </a:xfrm>
-          <a:prstGeom prst="rect">
-            <a:avLst/>
-          </a:prstGeom>
-          <a:noFill/>
-        </p:spPr>
-        <p:txBody>
-          <a:bodyPr wrap="square" lIns="0" rIns="0" tIns="0" bIns="0">
-            <a:spAutoFit/>
-          </a:bodyPr>
-          <a:lstStyle/>
-          <a:p>
-            <a:pPr algn="l">
-              <a:lnSpc>
-                <a:spcPct val="145000"/>
-              </a:lnSpc>
-              <a:spcAft>
-                <a:spcPts val="600"/>
-              </a:spcAft>
-            </a:pPr>
-            <a:r>
-              <a:rPr sz="1500" b="0">
-                <a:solidFill>
-                  <a:srgbClr val="F2F5FB"/>
-                </a:solidFill>
-                <a:latin typeface="Menlo"/>
-              </a:rPr>
-              <a:t>uv sync                # builds .venv from uv.lock</a:t>
-            </a:r>
-          </a:p>
-          <a:p>
-            <a:pPr algn="l">
-              <a:lnSpc>
-                <a:spcPct val="145000"/>
-              </a:lnSpc>
-              <a:spcAft>
-                <a:spcPts val="600"/>
-              </a:spcAft>
-            </a:pPr>
-            <a:r>
-              <a:rPr sz="1500" b="0">
-                <a:solidFill>
-                  <a:srgbClr val="F2F5FB"/>
-                </a:solidFill>
-                <a:latin typeface="Menlo"/>
-              </a:rPr>
-              <a:t>cp .env.example .env   # RIME_API_KEY is the only one you truly need</a:t>
-            </a:r>
-          </a:p>
-          <a:p>
-            <a:pPr algn="l">
-              <a:lnSpc>
-                <a:spcPct val="145000"/>
-              </a:lnSpc>
-              <a:spcAft>
-                <a:spcPts val="600"/>
-              </a:spcAft>
-            </a:pPr>
-            <a:r>
-              <a:rPr sz="1500" b="0">
-                <a:solidFill>
-                  <a:srgbClr val="F2F5FB"/>
-                </a:solidFill>
-                <a:latin typeface="Menlo"/>
-              </a:rPr>
-              <a:t/>
-            </a:r>
-          </a:p>
-          <a:p>
-            <a:pPr algn="l">
-              <a:lnSpc>
-                <a:spcPct val="145000"/>
-              </a:lnSpc>
-              <a:spcAft>
-                <a:spcPts val="600"/>
-              </a:spcAft>
-            </a:pPr>
-            <a:r>
-              <a:rPr sz="1500" b="0">
-                <a:solidFill>
-                  <a:srgbClr val="F2F5FB"/>
-                </a:solidFill>
-                <a:latin typeface="Menlo"/>
-              </a:rPr>
-              <a:t>make test              # 421 tests</a:t>
-            </a:r>
-          </a:p>
-          <a:p>
-            <a:pPr algn="l">
-              <a:lnSpc>
-                <a:spcPct val="145000"/>
-              </a:lnSpc>
-              <a:spcAft>
-                <a:spcPts val="600"/>
-              </a:spcAft>
-            </a:pPr>
-            <a:r>
-              <a:rPr sz="1500" b="0">
-                <a:solidFill>
-                  <a:srgbClr val="F2F5FB"/>
-                </a:solidFill>
-                <a:latin typeface="Menlo"/>
-              </a:rPr>
-              <a:t>make demo-fixtures     # barge-in and rushed consent, offline</a:t>
-            </a:r>
-          </a:p>
-          <a:p>
-            <a:pPr algn="l">
-              <a:lnSpc>
-                <a:spcPct val="145000"/>
-              </a:lnSpc>
-              <a:spcAft>
-                <a:spcPts val="600"/>
-              </a:spcAft>
-            </a:pPr>
-            <a:r>
-              <a:rPr sz="1500" b="0">
-                <a:solidFill>
-                  <a:srgbClr val="F2F5FB"/>
-                </a:solidFill>
-                <a:latin typeface="Menlo"/>
-              </a:rPr>
-              <a:t>make channel           # the 8 kHz μ-law chain</a:t>
-            </a:r>
-          </a:p>
-          <a:p>
-            <a:pPr algn="l">
-              <a:lnSpc>
-                <a:spcPct val="145000"/>
-              </a:lnSpc>
-              <a:spcAft>
-                <a:spcPts val="600"/>
-              </a:spcAft>
-            </a:pPr>
-            <a:r>
-              <a:rPr sz="1500" b="0">
-                <a:solidFill>
-                  <a:srgbClr val="F2F5FB"/>
-                </a:solidFill>
-                <a:latin typeface="Menlo"/>
-              </a:rPr>
-              <a:t>make secrets           # no credential ever touched git history</a:t>
-            </a:r>
-          </a:p>
-          <a:p>
-            <a:pPr algn="l">
-              <a:lnSpc>
-                <a:spcPct val="145000"/>
-              </a:lnSpc>
-              <a:spcAft>
-                <a:spcPts val="600"/>
-              </a:spcAft>
-            </a:pPr>
-            <a:r>
-              <a:rPr sz="1500" b="0">
-                <a:solidFill>
-                  <a:srgbClr val="F2F5FB"/>
-                </a:solidFill>
-                <a:latin typeface="Menlo"/>
-              </a:rPr>
-              <a:t/>
-            </a:r>
-          </a:p>
-          <a:p>
-            <a:pPr algn="l">
-              <a:lnSpc>
-                <a:spcPct val="145000"/>
-              </a:lnSpc>
-              <a:spcAft>
-                <a:spcPts val="600"/>
-              </a:spcAft>
-            </a:pPr>
-            <a:r>
-              <a:rPr sz="1500" b="0">
-                <a:solidFill>
-                  <a:srgbClr val="F2F5FB"/>
-                </a:solidFill>
-                <a:latin typeface="Menlo"/>
-              </a:rPr>
-              <a:t>make serve             # terminal 1 — /, /intake, /c/{id}</a:t>
-            </a:r>
-          </a:p>
-          <a:p>
-            <a:pPr algn="l">
-              <a:lnSpc>
-                <a:spcPct val="145000"/>
-              </a:lnSpc>
-              <a:spcAft>
-                <a:spcPts val="600"/>
-              </a:spcAft>
-            </a:pPr>
-            <a:r>
-              <a:rPr sz="1500" b="0">
-                <a:solidFill>
-                  <a:srgbClr val="F2F5FB"/>
-                </a:solidFill>
-                <a:latin typeface="Menlo"/>
-              </a:rPr>
-              <a:t>make agent             # terminal 2 — the consent worker</a:t>
-            </a:r>
-          </a:p>
-          <a:p>
-            <a:pPr algn="l">
-              <a:lnSpc>
-                <a:spcPct val="145000"/>
-              </a:lnSpc>
-              <a:spcAft>
-                <a:spcPts val="600"/>
-              </a:spcAft>
-            </a:pPr>
-            <a:r>
-              <a:rPr sz="1500" b="0">
-                <a:solidFill>
-                  <a:srgbClr val="F2F5FB"/>
-                </a:solidFill>
-                <a:latin typeface="Menlo"/>
-              </a:rPr>
-              <a:t/>
-            </a:r>
-          </a:p>
-          <a:p>
-            <a:pPr algn="l">
-              <a:lnSpc>
-                <a:spcPct val="145000"/>
-              </a:lnSpc>
-              <a:spcAft>
-                <a:spcPts val="600"/>
-              </a:spcAft>
-            </a:pPr>
-            <a:r>
-              <a:rPr sz="1500" b="0">
-                <a:solidFill>
-                  <a:srgbClr val="F2F5FB"/>
-                </a:solidFill>
-                <a:latin typeface="Menlo"/>
-              </a:rPr>
-              <a:t>make e2e ARGS="--drive"   # upload → Rime → FSM → assert the sealed record</a:t>
-            </a:r>
-          </a:p>
-        </p:txBody>
-      </p:sp>
-      <p:sp>
-        <p:nvSpPr>
-          <p:cNvPr id="6" name="TextBox 5"/>
-          <p:cNvSpPr txBox="1"/>
-          <p:nvPr/>
-        </p:nvSpPr>
-        <p:spPr>
-          <a:xfrm>
-            <a:off x="731520" y="5897880"/>
-            <a:ext cx="10881360" cy="548640"/>
-          </a:xfrm>
-          <a:prstGeom prst="rect">
-            <a:avLst/>
-          </a:prstGeom>
-          <a:noFill/>
-        </p:spPr>
-        <p:txBody>
-          <a:bodyPr wrap="square" lIns="0" rIns="0" tIns="0" bIns="0">
-            <a:spAutoFit/>
-          </a:bodyPr>
-          <a:lstStyle/>
-          <a:p>
-            <a:pPr algn="l">
-              <a:lnSpc>
-                <a:spcPct val="125000"/>
-              </a:lnSpc>
-              <a:spcAft>
-                <a:spcPts val="600"/>
-              </a:spcAft>
-            </a:pPr>
-            <a:r>
-              <a:rPr sz="1300" b="0">
-                <a:solidFill>
-                  <a:srgbClr val="98A1B6"/>
-                </a:solidFill>
-                <a:latin typeface="Helvetica Neue"/>
-              </a:rPr>
-              <a:t>Every performance number is backed by a committed artifact under evals/results/. ffmpeg is the one non-Python prerequisite.</a:t>
-            </a:r>
-          </a:p>
-        </p:txBody>
-      </p:sp>
-    </p:spTree>
-  </p:cSld>
-  <p:clrMapOvr>
-    <a:masterClrMapping/>
-  </p:clrMapOvr>
-</p:sld>
-</file>
-
-<file path=ppt/slides/slide12.xml><?xml version="1.0" encoding="utf-8"?>
-<p:sld xmlns:a="http://schemas.openxmlformats.org/drawingml/2006/main" xmlns:p="http://schemas.openxmlformats.org/presentationml/2006/main" xmlns:r="http://schemas.openxmlformats.org/officeDocument/2006/relationships">
-  <p:cSld>
-    <p:bg>
-      <p:bgPr>
-        <a:solidFill>
-          <a:srgbClr val="0B0D12"/>
-        </a:solidFill>
-        <a:effectLst/>
-      </p:bgPr>
-    </p:bg>
-    <p:spTree>
-      <p:nvGrpSpPr>
-        <p:cNvPr id="1" name=""/>
-        <p:cNvGrpSpPr/>
-        <p:nvPr/>
-      </p:nvGrpSpPr>
-      <p:grpSpPr/>
-      <p:sp>
-        <p:nvSpPr>
-          <p:cNvPr id="2" name="TextBox 1"/>
-          <p:cNvSpPr txBox="1"/>
-          <p:nvPr/>
-        </p:nvSpPr>
-        <p:spPr>
-          <a:xfrm>
-            <a:off x="914400" y="2286000"/>
-            <a:ext cx="10332720" cy="1828800"/>
-          </a:xfrm>
-          <a:prstGeom prst="rect">
-            <a:avLst/>
-          </a:prstGeom>
-          <a:noFill/>
-        </p:spPr>
-        <p:txBody>
-          <a:bodyPr wrap="square" lIns="0" rIns="0" tIns="0" bIns="0">
-            <a:spAutoFit/>
-          </a:bodyPr>
-          <a:lstStyle/>
-          <a:p>
-            <a:pPr algn="l">
-              <a:lnSpc>
-                <a:spcPct val="125000"/>
-              </a:lnSpc>
-              <a:spcAft>
-                <a:spcPts val="600"/>
-              </a:spcAft>
-            </a:pPr>
-            <a:r>
-              <a:rPr sz="4000" b="1">
-                <a:solidFill>
-                  <a:srgbClr val="F2F5FB"/>
-                </a:solidFill>
-                <a:latin typeface="Helvetica Neue"/>
-              </a:rPr>
-              <a:t>Remove speech and the product</a:t>
-            </a:r>
-          </a:p>
-          <a:p>
-            <a:pPr algn="l">
-              <a:lnSpc>
-                <a:spcPct val="125000"/>
-              </a:lnSpc>
-              <a:spcAft>
-                <a:spcPts val="600"/>
-              </a:spcAft>
-            </a:pPr>
-            <a:r>
-              <a:rPr sz="4000" b="1">
-                <a:solidFill>
-                  <a:srgbClr val="F2F5FB"/>
-                </a:solidFill>
-                <a:latin typeface="Helvetica Neue"/>
-              </a:rPr>
-              <a:t>does not degrade — it ceases to exist.</a:t>
-            </a:r>
-          </a:p>
-        </p:txBody>
-      </p:sp>
-      <p:sp>
-        <p:nvSpPr>
-          <p:cNvPr id="3" name="Rectangle 2"/>
-          <p:cNvSpPr/>
-          <p:nvPr/>
-        </p:nvSpPr>
-        <p:spPr>
-          <a:xfrm>
-            <a:off x="960120" y="4389120"/>
-            <a:ext cx="2011680" cy="19050"/>
-          </a:xfrm>
-          <a:prstGeom prst="rect">
-            <a:avLst/>
-          </a:prstGeom>
-          <a:solidFill>
-            <a:srgbClr val="1DB954"/>
-          </a:solidFill>
-          <a:ln>
-            <a:noFill/>
-          </a:ln>
-          <a:effectLst/>
-        </p:spPr>
-        <p:style>
-          <a:lnRef idx="1">
-            <a:schemeClr val="accent1"/>
-          </a:lnRef>
-          <a:fillRef idx="3">
-            <a:schemeClr val="accent1"/>
-          </a:fillRef>
-          <a:effectRef idx="2">
-            <a:schemeClr val="accent1"/>
-          </a:effectRef>
-          <a:fontRef idx="minor">
-            <a:schemeClr val="lt1"/>
-          </a:fontRef>
-        </p:style>
-        <p:txBody>
-          <a:bodyPr rtlCol="0" anchor="ctr"/>
-          <a:lstStyle/>
-          <a:p>
-            <a:pPr algn="ctr"/>
-          </a:p>
-        </p:txBody>
-      </p:sp>
-      <p:sp>
-        <p:nvSpPr>
-          <p:cNvPr id="4" name="TextBox 3"/>
-          <p:cNvSpPr txBox="1"/>
-          <p:nvPr/>
-        </p:nvSpPr>
-        <p:spPr>
-          <a:xfrm>
-            <a:off x="960120" y="4709160"/>
-            <a:ext cx="10058400" cy="457200"/>
-          </a:xfrm>
-          <a:prstGeom prst="rect">
-            <a:avLst/>
-          </a:prstGeom>
-          <a:noFill/>
-        </p:spPr>
-        <p:txBody>
-          <a:bodyPr wrap="square" lIns="0" rIns="0" tIns="0" bIns="0">
-            <a:spAutoFit/>
-          </a:bodyPr>
-          <a:lstStyle/>
-          <a:p>
-            <a:pPr algn="l">
-              <a:lnSpc>
-                <a:spcPct val="125000"/>
-              </a:lnSpc>
-              <a:spcAft>
-                <a:spcPts val="600"/>
-              </a:spcAft>
-            </a:pPr>
-            <a:r>
-              <a:rPr sz="1500" b="0">
-                <a:solidFill>
-                  <a:srgbClr val="98A1B6"/>
-                </a:solidFill>
-                <a:latin typeface="Menlo"/>
-              </a:rPr>
-              <a:t>video/samjha_demo.mp4   ·   RIME_EVIDENCE.md   ·   evals/ACCEPTANCE.md</a:t>
+              <a:t>README.md (architecture + executive summary) · RIME_EVIDENCE.md · evals/ACCEPTANCE.md · video/samjha_demo.mp4</a:t>
             </a:r>
           </a:p>
         </p:txBody>
@@ -4511,7 +3652,7 @@
                 </a:solidFill>
                 <a:latin typeface="Helvetica Neue"/>
               </a:rPr>
-              <a:t>THE PROBLEM</a:t>
+              <a:t>THE THING TO REMEMBER</a:t>
             </a:r>
           </a:p>
         </p:txBody>
@@ -4553,7 +3694,7 @@
                 </a:solidFill>
                 <a:latin typeface="Helvetica Neue"/>
               </a:rPr>
-              <a:t>She acknowledges a document she cannot read.</a:t>
+              <a:t>She heard 96.6% of the clause.</a:t>
             </a:r>
           </a:p>
         </p:txBody>
@@ -4610,8 +3751,8 @@
         </p:nvSpPr>
         <p:spPr>
           <a:xfrm>
-            <a:off x="731520" y="2011680"/>
-            <a:ext cx="10698480" cy="868680"/>
+            <a:off x="731520" y="2057400"/>
+            <a:ext cx="3840480" cy="1371600"/>
           </a:xfrm>
           <a:prstGeom prst="rect">
             <a:avLst/>
@@ -4633,13 +3774,13 @@
               </a:spcAft>
             </a:pPr>
             <a:r>
-              <a:rPr sz="1800" b="0">
-                <a:solidFill>
-                  <a:srgbClr val="F2F5FB"/>
+              <a:rPr sz="8000" b="1">
+                <a:solidFill>
+                  <a:srgbClr val="FFB020"/>
                 </a:solidFill>
                 <a:latin typeface="Helvetica Neue"/>
               </a:rPr>
-              <a:t>·  RBI mandates a Key Facts Statement for every retail loan — in a language the borrower understands, with informed acknowledgement.</a:t>
+              <a:t>96.6%</a:t>
             </a:r>
           </a:p>
         </p:txBody>
@@ -4652,8 +3793,8 @@
         </p:nvSpPr>
         <p:spPr>
           <a:xfrm>
-            <a:off x="731520" y="2880360"/>
-            <a:ext cx="10698480" cy="868680"/>
+            <a:off x="777240" y="3337560"/>
+            <a:ext cx="3840480" cy="457200"/>
           </a:xfrm>
           <a:prstGeom prst="rect">
             <a:avLst/>
@@ -4668,20 +3809,20 @@
           <a:p>
             <a:pPr algn="l">
               <a:lnSpc>
-                <a:spcPct val="125000"/>
+                <a:spcPct val="120000"/>
               </a:lnSpc>
               <a:spcAft>
                 <a:spcPts val="600"/>
               </a:spcAft>
             </a:pPr>
             <a:r>
-              <a:rPr sz="1800" b="0">
-                <a:solidFill>
-                  <a:srgbClr val="F2F5FB"/>
+              <a:rPr sz="1400" b="0">
+                <a:solidFill>
+                  <a:srgbClr val="98A1B6"/>
                 </a:solidFill>
                 <a:latin typeface="Helvetica Neue"/>
               </a:rPr>
-              <a:t>·  In practice: the lender emails a PDF and collects an OTP.</a:t>
+              <a:t>of the clause played before she interrupted</a:t>
             </a:r>
           </a:p>
         </p:txBody>
@@ -4694,8 +3835,8 @@
         </p:nvSpPr>
         <p:spPr>
           <a:xfrm>
-            <a:off x="731520" y="3749040"/>
-            <a:ext cx="10698480" cy="868680"/>
+            <a:off x="731520" y="4023360"/>
+            <a:ext cx="4937760" cy="731520"/>
           </a:xfrm>
           <a:prstGeom prst="rect">
             <a:avLst/>
@@ -4717,71 +3858,27 @@
               </a:spcAft>
             </a:pPr>
             <a:r>
-              <a:rPr sz="1800" b="0">
-                <a:solidFill>
-                  <a:srgbClr val="F2F5FB"/>
+              <a:rPr sz="3800" b="1">
+                <a:solidFill>
+                  <a:srgbClr val="FF5C5C"/>
                 </a:solidFill>
                 <a:latin typeface="Helvetica Neue"/>
               </a:rPr>
-              <a:t>·  The loan was sold on a phone call. There is no screen, and she has low reading fluency.</a:t>
-            </a:r>
-          </a:p>
-        </p:txBody>
-      </p:sp>
-      <p:sp>
-        <p:nvSpPr>
-          <p:cNvPr id="8" name="Rectangle 7"/>
-          <p:cNvSpPr/>
-          <p:nvPr/>
-        </p:nvSpPr>
-        <p:spPr>
-          <a:xfrm>
-            <a:off x="731520" y="4663440"/>
-            <a:ext cx="10698480" cy="19050"/>
-          </a:xfrm>
-          <a:prstGeom prst="rect">
-            <a:avLst/>
-          </a:prstGeom>
-          <a:solidFill>
-            <a:srgbClr val="242A38"/>
-          </a:solidFill>
-          <a:ln>
-            <a:noFill/>
-          </a:ln>
-          <a:effectLst/>
-        </p:spPr>
-        <p:style>
-          <a:lnRef idx="1">
-            <a:schemeClr val="accent1"/>
-          </a:lnRef>
-          <a:fillRef idx="3">
-            <a:schemeClr val="accent1"/>
-          </a:fillRef>
-          <a:effectRef idx="2">
-            <a:schemeClr val="accent1"/>
-          </a:effectRef>
-          <a:fontRef idx="minor">
-            <a:schemeClr val="lt1"/>
-          </a:fontRef>
-        </p:style>
-        <p:txBody>
-          <a:bodyPr rtlCol="0" anchor="ctr"/>
-          <a:lstStyle/>
-          <a:p>
-            <a:pPr algn="ctr"/>
-          </a:p>
-        </p:txBody>
-      </p:sp>
-      <p:sp>
-        <p:nvSpPr>
-          <p:cNvPr id="9" name="TextBox 8"/>
+              <a:t>CONSENT REFUSED</a:t>
+            </a:r>
+          </a:p>
+        </p:txBody>
+      </p:sp>
+      <p:sp>
+        <p:nvSpPr>
+          <p:cNvPr id="8" name="TextBox 7"/>
           <p:cNvSpPr txBox="1"/>
           <p:nvPr/>
         </p:nvSpPr>
         <p:spPr>
           <a:xfrm>
-            <a:off x="731520" y="4937760"/>
-            <a:ext cx="10698480" cy="548640"/>
+            <a:off x="731520" y="4846320"/>
+            <a:ext cx="5120640" cy="1463040"/>
           </a:xfrm>
           <a:prstGeom prst="rect">
             <a:avLst/>
@@ -4796,24 +3893,91 @@
           <a:p>
             <a:pPr algn="l">
               <a:lnSpc>
-                <a:spcPct val="125000"/>
+                <a:spcPct val="145000"/>
               </a:lnSpc>
               <a:spcAft>
                 <a:spcPts val="600"/>
               </a:spcAft>
             </a:pPr>
             <a:r>
-              <a:rPr sz="2400" b="1">
-                <a:solidFill>
-                  <a:srgbClr val="FFB020"/>
+              <a:rPr sz="1700" b="0">
+                <a:solidFill>
+                  <a:srgbClr val="F2F5FB"/>
                 </a:solidFill>
                 <a:latin typeface="Helvetica Neue"/>
               </a:rPr>
-              <a:t>The regulation is satisfied. The borrower is not informed.</a:t>
-            </a:r>
-          </a:p>
-        </p:txBody>
-      </p:sp>
+              <a:t>The account number lived in the last segment.</a:t>
+            </a:r>
+          </a:p>
+          <a:p>
+            <a:pPr algn="l">
+              <a:lnSpc>
+                <a:spcPct val="145000"/>
+              </a:lnSpc>
+              <a:spcAft>
+                <a:spcPts val="600"/>
+              </a:spcAft>
+            </a:pPr>
+            <a:r>
+              <a:rPr sz="1700" b="0">
+                <a:solidFill>
+                  <a:srgbClr val="F2F5FB"/>
+                </a:solidFill>
+                <a:latin typeface="Helvetica Neue"/>
+              </a:rPr>
+              <a:t>That segment never finished.</a:t>
+            </a:r>
+          </a:p>
+          <a:p>
+            <a:pPr algn="l">
+              <a:lnSpc>
+                <a:spcPct val="145000"/>
+              </a:lnSpc>
+              <a:spcAft>
+                <a:spcPts val="600"/>
+              </a:spcAft>
+            </a:pPr>
+            <a:r>
+              <a:rPr sz="1700" b="0">
+                <a:solidFill>
+                  <a:srgbClr val="F2F5FB"/>
+                </a:solidFill>
+                <a:latin typeface="Helvetica Neue"/>
+              </a:rPr>
+              <a:t>She said yes. The system said no.</a:t>
+            </a:r>
+          </a:p>
+        </p:txBody>
+      </p:sp>
+      <p:pic>
+        <p:nvPicPr>
+          <p:cNvPr id="9" name="Picture 8" descr="record.png"/>
+          <p:cNvPicPr>
+            <a:picLocks noChangeAspect="1"/>
+          </p:cNvPicPr>
+          <p:nvPr/>
+        </p:nvPicPr>
+        <p:blipFill>
+          <a:blip r:embed="rId2"/>
+          <a:stretch>
+            <a:fillRect/>
+          </a:stretch>
+        </p:blipFill>
+        <p:spPr>
+          <a:xfrm>
+            <a:off x="6309360" y="2057400"/>
+            <a:ext cx="5212080" cy="2443162"/>
+          </a:xfrm>
+          <a:prstGeom prst="rect">
+            <a:avLst/>
+          </a:prstGeom>
+          <a:ln w="12700">
+            <a:solidFill>
+              <a:srgbClr val="242A38"/>
+            </a:solidFill>
+          </a:ln>
+        </p:spPr>
+      </p:pic>
       <p:sp>
         <p:nvSpPr>
           <p:cNvPr id="10" name="TextBox 9"/>
@@ -4822,8 +3986,8 @@
         </p:nvSpPr>
         <p:spPr>
           <a:xfrm>
-            <a:off x="731520" y="5623560"/>
-            <a:ext cx="10698480" cy="457200"/>
+            <a:off x="6309360" y="5989320"/>
+            <a:ext cx="5212080" cy="457200"/>
           </a:xfrm>
           <a:prstGeom prst="rect">
             <a:avLst/>
@@ -4838,20 +4002,20 @@
           <a:p>
             <a:pPr algn="l">
               <a:lnSpc>
-                <a:spcPct val="125000"/>
+                <a:spcPct val="120000"/>
               </a:lnSpc>
               <a:spcAft>
                 <a:spcPts val="600"/>
               </a:spcAft>
             </a:pPr>
             <a:r>
-              <a:rPr sz="1500" b="0">
+              <a:rPr sz="1200" b="0">
                 <a:solidFill>
                   <a:srgbClr val="98A1B6"/>
                 </a:solidFill>
                 <a:latin typeface="Helvetica Neue"/>
               </a:rPr>
-              <a:t>Remove speech and the product does not degrade — it ceases to exist.</a:t>
+              <a:t>The sealed record. A refusal is a row, not an error.</a:t>
             </a:r>
           </a:p>
         </p:txBody>
@@ -4919,7 +4083,7 @@
                 </a:solidFill>
                 <a:latin typeface="Helvetica Neue"/>
               </a:rPr>
-              <a:t>WHAT WE BUILT</a:t>
+              <a:t>WHY THAT MATTERS</a:t>
             </a:r>
           </a:p>
         </p:txBody>
@@ -4961,7 +4125,7 @@
                 </a:solidFill>
                 <a:latin typeface="Helvetica Neue"/>
               </a:rPr>
-              <a:t>A document goes in. A defensible consent record comes out.</a:t>
+              <a:t>She acknowledges a document she cannot read.</a:t>
             </a:r>
           </a:p>
         </p:txBody>
@@ -5018,8 +4182,8 @@
         </p:nvSpPr>
         <p:spPr>
           <a:xfrm>
-            <a:off x="731520" y="1965960"/>
-            <a:ext cx="6583680" cy="3291840"/>
+            <a:off x="731520" y="2194560"/>
+            <a:ext cx="10698480" cy="868680"/>
           </a:xfrm>
           <a:prstGeom prst="rect">
             <a:avLst/>
@@ -5034,134 +4198,20 @@
           <a:p>
             <a:pPr algn="l">
               <a:lnSpc>
-                <a:spcPct val="155000"/>
+                <a:spcPct val="125000"/>
               </a:lnSpc>
               <a:spcAft>
                 <a:spcPts val="600"/>
               </a:spcAft>
             </a:pPr>
             <a:r>
-              <a:rPr sz="1600" b="0">
+              <a:rPr sz="2200" b="0">
                 <a:solidFill>
                   <a:srgbClr val="F2F5FB"/>
                 </a:solidFill>
-                <a:latin typeface="Menlo"/>
-              </a:rPr>
-              <a:t>KFS  (PDF or Word)</a:t>
-            </a:r>
-          </a:p>
-          <a:p>
-            <a:pPr algn="l">
-              <a:lnSpc>
-                <a:spcPct val="155000"/>
-              </a:lnSpc>
-              <a:spcAft>
-                <a:spcPts val="600"/>
-              </a:spcAft>
-            </a:pPr>
-            <a:r>
-              <a:rPr sz="1600" b="0">
-                <a:solidFill>
-                  <a:srgbClr val="F2F5FB"/>
-                </a:solidFill>
-                <a:latin typeface="Menlo"/>
-              </a:rPr>
-              <a:t>   →  deterministic table parse, no OCR, no model in the loop</a:t>
-            </a:r>
-          </a:p>
-          <a:p>
-            <a:pPr algn="l">
-              <a:lnSpc>
-                <a:spcPct val="155000"/>
-              </a:lnSpc>
-              <a:spcAft>
-                <a:spcPts val="600"/>
-              </a:spcAft>
-            </a:pPr>
-            <a:r>
-              <a:rPr sz="1600" b="0">
-                <a:solidFill>
-                  <a:srgbClr val="F2F5FB"/>
-                </a:solidFill>
-                <a:latin typeface="Menlo"/>
-              </a:rPr>
-              <a:t>   →  Hindi clauses, ONE key value per spoken segment</a:t>
-            </a:r>
-          </a:p>
-          <a:p>
-            <a:pPr algn="l">
-              <a:lnSpc>
-                <a:spcPct val="155000"/>
-              </a:lnSpc>
-              <a:spcAft>
-                <a:spcPts val="600"/>
-              </a:spcAft>
-            </a:pPr>
-            <a:r>
-              <a:rPr sz="1600" b="0">
-                <a:solidFill>
-                  <a:srgbClr val="F2F5FB"/>
-                </a:solidFill>
-                <a:latin typeface="Menlo"/>
-              </a:rPr>
-              <a:t>   →  Rime Coda over /ws3, 8 kHz μ-law</a:t>
-            </a:r>
-          </a:p>
-          <a:p>
-            <a:pPr algn="l">
-              <a:lnSpc>
-                <a:spcPct val="155000"/>
-              </a:lnSpc>
-              <a:spcAft>
-                <a:spcPts val="600"/>
-              </a:spcAft>
-            </a:pPr>
-            <a:r>
-              <a:rPr sz="1600" b="0">
-                <a:solidFill>
-                  <a:srgbClr val="F2F5FB"/>
-                </a:solidFill>
-                <a:latin typeface="Menlo"/>
-              </a:rPr>
-              <a:t>   →  LiveKit to her phone · Sarvam for her replies</a:t>
-            </a:r>
-          </a:p>
-          <a:p>
-            <a:pPr algn="l">
-              <a:lnSpc>
-                <a:spcPct val="155000"/>
-              </a:lnSpc>
-              <a:spcAft>
-                <a:spcPts val="600"/>
-              </a:spcAft>
-            </a:pPr>
-            <a:r>
-              <a:rPr sz="1600" b="0">
-                <a:solidFill>
-                  <a:srgbClr val="F2F5FB"/>
-                </a:solidFill>
-                <a:latin typeface="Menlo"/>
-              </a:rPr>
-              <a:t>   →  consent FSM: heard → teach-back → understood</a:t>
-            </a:r>
-          </a:p>
-          <a:p>
-            <a:pPr algn="l">
-              <a:lnSpc>
-                <a:spcPct val="155000"/>
-              </a:lnSpc>
-              <a:spcAft>
-                <a:spcPts val="600"/>
-              </a:spcAft>
-            </a:pPr>
-            <a:r>
-              <a:rPr sz="1600" b="0">
-                <a:solidFill>
-                  <a:srgbClr val="F2F5FB"/>
-                </a:solidFill>
-                <a:latin typeface="Menlo"/>
-              </a:rPr>
-              <a:t>   →  sha256-sealed record</a:t>
+                <a:latin typeface="Helvetica Neue"/>
+              </a:rPr>
+              <a:t>·  RBI: every retail loan needs a Key Facts Statement she understands.</a:t>
             </a:r>
           </a:p>
         </p:txBody>
@@ -5174,8 +4224,8 @@
         </p:nvSpPr>
         <p:spPr>
           <a:xfrm>
-            <a:off x="7680960" y="1965960"/>
-            <a:ext cx="3840480" cy="365760"/>
+            <a:off x="731520" y="3063240"/>
+            <a:ext cx="10698480" cy="868680"/>
           </a:xfrm>
           <a:prstGeom prst="rect">
             <a:avLst/>
@@ -5197,13 +4247,13 @@
               </a:spcAft>
             </a:pPr>
             <a:r>
-              <a:rPr sz="1500" b="1">
-                <a:solidFill>
-                  <a:srgbClr val="1DB954"/>
+              <a:rPr sz="2200" b="0">
+                <a:solidFill>
+                  <a:srgbClr val="F2F5FB"/>
                 </a:solidFill>
                 <a:latin typeface="Helvetica Neue"/>
               </a:rPr>
-              <a:t>Three surfaces, three people</a:t>
+              <a:t>·  In practice: the lender emails a PDF and collects an OTP.</a:t>
             </a:r>
           </a:p>
         </p:txBody>
@@ -5216,8 +4266,8 @@
         </p:nvSpPr>
         <p:spPr>
           <a:xfrm>
-            <a:off x="7680960" y="2468880"/>
-            <a:ext cx="4023360" cy="475488"/>
+            <a:off x="731520" y="3931920"/>
+            <a:ext cx="10698480" cy="868680"/>
           </a:xfrm>
           <a:prstGeom prst="rect">
             <a:avLst/>
@@ -5239,27 +4289,71 @@
               </a:spcAft>
             </a:pPr>
             <a:r>
-              <a:rPr sz="1300" b="0">
-                <a:solidFill>
-                  <a:srgbClr val="98A1B6"/>
+              <a:rPr sz="2200" b="0">
+                <a:solidFill>
+                  <a:srgbClr val="F2F5FB"/>
                 </a:solidFill>
                 <a:latin typeface="Helvetica Neue"/>
               </a:rPr>
-              <a:t>·  /            the judge's evidence panel</a:t>
-            </a:r>
-          </a:p>
-        </p:txBody>
-      </p:sp>
-      <p:sp>
-        <p:nvSpPr>
-          <p:cNvPr id="8" name="TextBox 7"/>
+              <a:t>·  The loan was sold on a phone call. There is no screen.</a:t>
+            </a:r>
+          </a:p>
+        </p:txBody>
+      </p:sp>
+      <p:sp>
+        <p:nvSpPr>
+          <p:cNvPr id="8" name="Rectangle 7"/>
+          <p:cNvSpPr/>
+          <p:nvPr/>
+        </p:nvSpPr>
+        <p:spPr>
+          <a:xfrm>
+            <a:off x="731520" y="4800600"/>
+            <a:ext cx="10698480" cy="19050"/>
+          </a:xfrm>
+          <a:prstGeom prst="rect">
+            <a:avLst/>
+          </a:prstGeom>
+          <a:solidFill>
+            <a:srgbClr val="242A38"/>
+          </a:solidFill>
+          <a:ln>
+            <a:noFill/>
+          </a:ln>
+          <a:effectLst/>
+        </p:spPr>
+        <p:style>
+          <a:lnRef idx="1">
+            <a:schemeClr val="accent1"/>
+          </a:lnRef>
+          <a:fillRef idx="3">
+            <a:schemeClr val="accent1"/>
+          </a:fillRef>
+          <a:effectRef idx="2">
+            <a:schemeClr val="accent1"/>
+          </a:effectRef>
+          <a:fontRef idx="minor">
+            <a:schemeClr val="lt1"/>
+          </a:fontRef>
+        </p:style>
+        <p:txBody>
+          <a:bodyPr rtlCol="0" anchor="ctr"/>
+          <a:lstStyle/>
+          <a:p>
+            <a:pPr algn="ctr"/>
+          </a:p>
+        </p:txBody>
+      </p:sp>
+      <p:sp>
+        <p:nvSpPr>
+          <p:cNvPr id="9" name="TextBox 8"/>
           <p:cNvSpPr txBox="1"/>
           <p:nvPr/>
         </p:nvSpPr>
         <p:spPr>
           <a:xfrm>
-            <a:off x="7680960" y="2944368"/>
-            <a:ext cx="4023360" cy="475488"/>
+            <a:off x="731520" y="5074920"/>
+            <a:ext cx="10698480" cy="548640"/>
           </a:xfrm>
           <a:prstGeom prst="rect">
             <a:avLst/>
@@ -5281,27 +4375,27 @@
               </a:spcAft>
             </a:pPr>
             <a:r>
-              <a:rPr sz="1300" b="0">
-                <a:solidFill>
-                  <a:srgbClr val="98A1B6"/>
+              <a:rPr sz="2600" b="1">
+                <a:solidFill>
+                  <a:srgbClr val="FFB020"/>
                 </a:solidFill>
                 <a:latin typeface="Helvetica Neue"/>
               </a:rPr>
-              <a:t>·  /intake      the officer's review desk</a:t>
-            </a:r>
-          </a:p>
-        </p:txBody>
-      </p:sp>
-      <p:sp>
-        <p:nvSpPr>
-          <p:cNvPr id="9" name="TextBox 8"/>
+              <a:t>The regulation is satisfied. The borrower is not informed.</a:t>
+            </a:r>
+          </a:p>
+        </p:txBody>
+      </p:sp>
+      <p:sp>
+        <p:nvSpPr>
+          <p:cNvPr id="10" name="TextBox 9"/>
           <p:cNvSpPr txBox="1"/>
           <p:nvPr/>
         </p:nvSpPr>
         <p:spPr>
           <a:xfrm>
-            <a:off x="7680960" y="3419856"/>
-            <a:ext cx="4023360" cy="475488"/>
+            <a:off x="731520" y="5852160"/>
+            <a:ext cx="10698480" cy="457200"/>
           </a:xfrm>
           <a:prstGeom prst="rect">
             <a:avLst/>
@@ -5323,55 +4417,13 @@
               </a:spcAft>
             </a:pPr>
             <a:r>
-              <a:rPr sz="1300" b="0">
-                <a:solidFill>
-                  <a:srgbClr val="F2F5FB"/>
+              <a:rPr sz="1500" b="0">
+                <a:solidFill>
+                  <a:srgbClr val="98A1B6"/>
                 </a:solidFill>
                 <a:latin typeface="Helvetica Neue"/>
               </a:rPr>
-              <a:t>·  /c/{id}      THE BORROWER — one tap</a:t>
-            </a:r>
-          </a:p>
-        </p:txBody>
-      </p:sp>
-      <p:sp>
-        <p:nvSpPr>
-          <p:cNvPr id="10" name="TextBox 9"/>
-          <p:cNvSpPr txBox="1"/>
-          <p:nvPr/>
-        </p:nvSpPr>
-        <p:spPr>
-          <a:xfrm>
-            <a:off x="7680960" y="4114800"/>
-            <a:ext cx="3931920" cy="1828800"/>
-          </a:xfrm>
-          <a:prstGeom prst="rect">
-            <a:avLst/>
-          </a:prstGeom>
-          <a:noFill/>
-        </p:spPr>
-        <p:txBody>
-          <a:bodyPr wrap="square" lIns="0" rIns="0" tIns="0" bIns="0">
-            <a:spAutoFit/>
-          </a:bodyPr>
-          <a:lstStyle/>
-          <a:p>
-            <a:pPr algn="l">
-              <a:lnSpc>
-                <a:spcPct val="125000"/>
-              </a:lnSpc>
-              <a:spcAft>
-                <a:spcPts val="600"/>
-              </a:spcAft>
-            </a:pPr>
-            <a:r>
-              <a:rPr sz="1200" b="0">
-                <a:solidFill>
-                  <a:srgbClr val="98A1B6"/>
-                </a:solidFill>
-                <a:latin typeface="Helvetica Neue"/>
-              </a:rPr>
-              <a:t>Choosing a PDF off a filesystem is itself a reading task, so the borrower does not do it. The record names who did (uploaded_by_role). Her part begins at “take the call”.</a:t>
+              <a:t>Remove speech and the product does not degrade — it ceases to exist.</a:t>
             </a:r>
           </a:p>
         </p:txBody>
@@ -5439,7 +4491,7 @@
                 </a:solidFill>
                 <a:latin typeface="Helvetica Neue"/>
               </a:rPr>
-              <a:t>THE OFFICER'S DESK  ·  /INTAKE</a:t>
+              <a:t>ARCHITECTURE</a:t>
             </a:r>
           </a:p>
         </p:txBody>
@@ -5481,7 +4533,7 @@
                 </a:solidFill>
                 <a:latin typeface="Helvetica Neue"/>
               </a:rPr>
-              <a:t>Nothing is ever guessed.</a:t>
+              <a:t>Document in. Sealed consent record out.</a:t>
             </a:r>
           </a:p>
         </p:txBody>
@@ -5530,45 +4582,767 @@
           </a:p>
         </p:txBody>
       </p:sp>
-      <p:pic>
-        <p:nvPicPr>
-          <p:cNvPr id="5" name="Picture 4" descr="intake_clauses.png"/>
-          <p:cNvPicPr>
-            <a:picLocks noChangeAspect="1"/>
-          </p:cNvPicPr>
-          <p:nvPr/>
-        </p:nvPicPr>
-        <p:blipFill>
-          <a:blip r:embed="rId2"/>
-          <a:stretch>
-            <a:fillRect/>
-          </a:stretch>
-        </p:blipFill>
-        <p:spPr>
-          <a:xfrm>
-            <a:off x="731520" y="1874519"/>
-            <a:ext cx="6400800" cy="4000500"/>
-          </a:xfrm>
-          <a:prstGeom prst="rect">
-            <a:avLst/>
-          </a:prstGeom>
-          <a:ln w="12700">
+      <p:sp>
+        <p:nvSpPr>
+          <p:cNvPr id="5" name="Rounded Rectangle 4"/>
+          <p:cNvSpPr/>
+          <p:nvPr/>
+        </p:nvSpPr>
+        <p:spPr>
+          <a:xfrm>
+            <a:off x="731520" y="1920240"/>
+            <a:ext cx="1853123" cy="1371600"/>
+          </a:xfrm>
+          <a:prstGeom prst="roundRect">
+            <a:avLst>
+              <a:gd name="adj" fmla="val 8000"/>
+            </a:avLst>
+          </a:prstGeom>
+          <a:solidFill>
+            <a:srgbClr val="131720"/>
+          </a:solidFill>
+          <a:ln w="15875">
             <a:solidFill>
               <a:srgbClr val="242A38"/>
             </a:solidFill>
           </a:ln>
-        </p:spPr>
-      </p:pic>
-      <p:sp>
-        <p:nvSpPr>
-          <p:cNvPr id="6" name="TextBox 5"/>
+          <a:effectLst/>
+        </p:spPr>
+        <p:style>
+          <a:lnRef idx="1">
+            <a:schemeClr val="accent1"/>
+          </a:lnRef>
+          <a:fillRef idx="3">
+            <a:schemeClr val="accent1"/>
+          </a:fillRef>
+          <a:effectRef idx="2">
+            <a:schemeClr val="accent1"/>
+          </a:effectRef>
+          <a:fontRef idx="minor">
+            <a:schemeClr val="lt1"/>
+          </a:fontRef>
+        </p:style>
+        <p:txBody>
+          <a:bodyPr rtlCol="0" anchor="ctr" wrap="square" tIns="54864" bIns="54864"/>
+          <a:lstStyle/>
+          <a:p>
+            <a:pPr algn="ctr">
+              <a:lnSpc>
+                <a:spcPct val="115000"/>
+              </a:lnSpc>
+              <a:spcAft>
+                <a:spcPts val="200"/>
+              </a:spcAft>
+            </a:pPr>
+            <a:r>
+              <a:rPr sz="1300" b="1">
+                <a:solidFill>
+                  <a:srgbClr val="F2F5FB"/>
+                </a:solidFill>
+                <a:latin typeface="Helvetica Neue"/>
+              </a:rPr>
+              <a:t>KFS</a:t>
+            </a:r>
+          </a:p>
+          <a:p>
+            <a:pPr algn="ctr">
+              <a:lnSpc>
+                <a:spcPct val="115000"/>
+              </a:lnSpc>
+              <a:spcAft>
+                <a:spcPts val="200"/>
+              </a:spcAft>
+            </a:pPr>
+            <a:r>
+              <a:rPr sz="1050" b="0">
+                <a:solidFill>
+                  <a:srgbClr val="98A1B6"/>
+                </a:solidFill>
+                <a:latin typeface="Menlo"/>
+              </a:rPr>
+              <a:t>PDF or .docx</a:t>
+            </a:r>
+          </a:p>
+        </p:txBody>
+      </p:sp>
+      <p:sp>
+        <p:nvSpPr>
+          <p:cNvPr id="6" name="Right Arrow 5"/>
+          <p:cNvSpPr/>
+          <p:nvPr/>
+        </p:nvSpPr>
+        <p:spPr>
+          <a:xfrm>
+            <a:off x="2639507" y="2487168"/>
+            <a:ext cx="256032" cy="237744"/>
+          </a:xfrm>
+          <a:prstGeom prst="rightArrow">
+            <a:avLst/>
+          </a:prstGeom>
+          <a:solidFill>
+            <a:srgbClr val="242A38"/>
+          </a:solidFill>
+          <a:ln>
+            <a:noFill/>
+          </a:ln>
+          <a:effectLst/>
+        </p:spPr>
+        <p:style>
+          <a:lnRef idx="1">
+            <a:schemeClr val="accent1"/>
+          </a:lnRef>
+          <a:fillRef idx="3">
+            <a:schemeClr val="accent1"/>
+          </a:fillRef>
+          <a:effectRef idx="2">
+            <a:schemeClr val="accent1"/>
+          </a:effectRef>
+          <a:fontRef idx="minor">
+            <a:schemeClr val="lt1"/>
+          </a:fontRef>
+        </p:style>
+        <p:txBody>
+          <a:bodyPr rtlCol="0" anchor="ctr"/>
+          <a:lstStyle/>
+          <a:p>
+            <a:pPr algn="ctr"/>
+          </a:p>
+        </p:txBody>
+      </p:sp>
+      <p:sp>
+        <p:nvSpPr>
+          <p:cNvPr id="7" name="Rounded Rectangle 6"/>
+          <p:cNvSpPr/>
+          <p:nvPr/>
+        </p:nvSpPr>
+        <p:spPr>
+          <a:xfrm>
+            <a:off x="2950403" y="1920240"/>
+            <a:ext cx="1853123" cy="1371600"/>
+          </a:xfrm>
+          <a:prstGeom prst="roundRect">
+            <a:avLst>
+              <a:gd name="adj" fmla="val 8000"/>
+            </a:avLst>
+          </a:prstGeom>
+          <a:solidFill>
+            <a:srgbClr val="131720"/>
+          </a:solidFill>
+          <a:ln w="15875">
+            <a:solidFill>
+              <a:srgbClr val="242A38"/>
+            </a:solidFill>
+          </a:ln>
+          <a:effectLst/>
+        </p:spPr>
+        <p:style>
+          <a:lnRef idx="1">
+            <a:schemeClr val="accent1"/>
+          </a:lnRef>
+          <a:fillRef idx="3">
+            <a:schemeClr val="accent1"/>
+          </a:fillRef>
+          <a:effectRef idx="2">
+            <a:schemeClr val="accent1"/>
+          </a:effectRef>
+          <a:fontRef idx="minor">
+            <a:schemeClr val="lt1"/>
+          </a:fontRef>
+        </p:style>
+        <p:txBody>
+          <a:bodyPr rtlCol="0" anchor="ctr" wrap="square" tIns="54864" bIns="54864"/>
+          <a:lstStyle/>
+          <a:p>
+            <a:pPr algn="ctr">
+              <a:lnSpc>
+                <a:spcPct val="115000"/>
+              </a:lnSpc>
+              <a:spcAft>
+                <a:spcPts val="200"/>
+              </a:spcAft>
+            </a:pPr>
+            <a:r>
+              <a:rPr sz="1300" b="1">
+                <a:solidFill>
+                  <a:srgbClr val="F2F5FB"/>
+                </a:solidFill>
+                <a:latin typeface="Helvetica Neue"/>
+              </a:rPr>
+              <a:t>PARSE</a:t>
+            </a:r>
+          </a:p>
+          <a:p>
+            <a:pPr algn="ctr">
+              <a:lnSpc>
+                <a:spcPct val="115000"/>
+              </a:lnSpc>
+              <a:spcAft>
+                <a:spcPts val="200"/>
+              </a:spcAft>
+            </a:pPr>
+            <a:r>
+              <a:rPr sz="1050" b="0">
+                <a:solidFill>
+                  <a:srgbClr val="98A1B6"/>
+                </a:solidFill>
+                <a:latin typeface="Menlo"/>
+              </a:rPr>
+              <a:t>table grid</a:t>
+            </a:r>
+          </a:p>
+          <a:p>
+            <a:pPr algn="ctr">
+              <a:lnSpc>
+                <a:spcPct val="115000"/>
+              </a:lnSpc>
+              <a:spcAft>
+                <a:spcPts val="200"/>
+              </a:spcAft>
+            </a:pPr>
+            <a:r>
+              <a:rPr sz="1050" b="0">
+                <a:solidFill>
+                  <a:srgbClr val="98A1B6"/>
+                </a:solidFill>
+                <a:latin typeface="Menlo"/>
+              </a:rPr>
+              <a:t>no OCR, no model</a:t>
+            </a:r>
+          </a:p>
+        </p:txBody>
+      </p:sp>
+      <p:sp>
+        <p:nvSpPr>
+          <p:cNvPr id="8" name="Right Arrow 7"/>
+          <p:cNvSpPr/>
+          <p:nvPr/>
+        </p:nvSpPr>
+        <p:spPr>
+          <a:xfrm>
+            <a:off x="4858390" y="2487168"/>
+            <a:ext cx="256032" cy="237744"/>
+          </a:xfrm>
+          <a:prstGeom prst="rightArrow">
+            <a:avLst/>
+          </a:prstGeom>
+          <a:solidFill>
+            <a:srgbClr val="242A38"/>
+          </a:solidFill>
+          <a:ln>
+            <a:noFill/>
+          </a:ln>
+          <a:effectLst/>
+        </p:spPr>
+        <p:style>
+          <a:lnRef idx="1">
+            <a:schemeClr val="accent1"/>
+          </a:lnRef>
+          <a:fillRef idx="3">
+            <a:schemeClr val="accent1"/>
+          </a:fillRef>
+          <a:effectRef idx="2">
+            <a:schemeClr val="accent1"/>
+          </a:effectRef>
+          <a:fontRef idx="minor">
+            <a:schemeClr val="lt1"/>
+          </a:fontRef>
+        </p:style>
+        <p:txBody>
+          <a:bodyPr rtlCol="0" anchor="ctr"/>
+          <a:lstStyle/>
+          <a:p>
+            <a:pPr algn="ctr"/>
+          </a:p>
+        </p:txBody>
+      </p:sp>
+      <p:sp>
+        <p:nvSpPr>
+          <p:cNvPr id="9" name="Rounded Rectangle 8"/>
+          <p:cNvSpPr/>
+          <p:nvPr/>
+        </p:nvSpPr>
+        <p:spPr>
+          <a:xfrm>
+            <a:off x="5169286" y="1920240"/>
+            <a:ext cx="1853123" cy="1371600"/>
+          </a:xfrm>
+          <a:prstGeom prst="roundRect">
+            <a:avLst>
+              <a:gd name="adj" fmla="val 8000"/>
+            </a:avLst>
+          </a:prstGeom>
+          <a:solidFill>
+            <a:srgbClr val="131720"/>
+          </a:solidFill>
+          <a:ln w="15875">
+            <a:solidFill>
+              <a:srgbClr val="1DB954"/>
+            </a:solidFill>
+          </a:ln>
+          <a:effectLst/>
+        </p:spPr>
+        <p:style>
+          <a:lnRef idx="1">
+            <a:schemeClr val="accent1"/>
+          </a:lnRef>
+          <a:fillRef idx="3">
+            <a:schemeClr val="accent1"/>
+          </a:fillRef>
+          <a:effectRef idx="2">
+            <a:schemeClr val="accent1"/>
+          </a:effectRef>
+          <a:fontRef idx="minor">
+            <a:schemeClr val="lt1"/>
+          </a:fontRef>
+        </p:style>
+        <p:txBody>
+          <a:bodyPr rtlCol="0" anchor="ctr" wrap="square" tIns="54864" bIns="54864"/>
+          <a:lstStyle/>
+          <a:p>
+            <a:pPr algn="ctr">
+              <a:lnSpc>
+                <a:spcPct val="115000"/>
+              </a:lnSpc>
+              <a:spcAft>
+                <a:spcPts val="200"/>
+              </a:spcAft>
+            </a:pPr>
+            <a:r>
+              <a:rPr sz="1300" b="1">
+                <a:solidFill>
+                  <a:srgbClr val="F2F5FB"/>
+                </a:solidFill>
+                <a:latin typeface="Helvetica Neue"/>
+              </a:rPr>
+              <a:t>SPEAK</a:t>
+            </a:r>
+          </a:p>
+          <a:p>
+            <a:pPr algn="ctr">
+              <a:lnSpc>
+                <a:spcPct val="115000"/>
+              </a:lnSpc>
+              <a:spcAft>
+                <a:spcPts val="200"/>
+              </a:spcAft>
+            </a:pPr>
+            <a:r>
+              <a:rPr sz="1050" b="0">
+                <a:solidFill>
+                  <a:srgbClr val="98A1B6"/>
+                </a:solidFill>
+                <a:latin typeface="Menlo"/>
+              </a:rPr>
+              <a:t>Rime Coda /ws3</a:t>
+            </a:r>
+          </a:p>
+          <a:p>
+            <a:pPr algn="ctr">
+              <a:lnSpc>
+                <a:spcPct val="115000"/>
+              </a:lnSpc>
+              <a:spcAft>
+                <a:spcPts val="200"/>
+              </a:spcAft>
+            </a:pPr>
+            <a:r>
+              <a:rPr sz="1050" b="0">
+                <a:solidFill>
+                  <a:srgbClr val="98A1B6"/>
+                </a:solidFill>
+                <a:latin typeface="Menlo"/>
+              </a:rPr>
+              <a:t>mulaw 8 kHz</a:t>
+            </a:r>
+          </a:p>
+          <a:p>
+            <a:pPr algn="ctr">
+              <a:lnSpc>
+                <a:spcPct val="115000"/>
+              </a:lnSpc>
+              <a:spcAft>
+                <a:spcPts val="200"/>
+              </a:spcAft>
+            </a:pPr>
+            <a:r>
+              <a:rPr sz="1050" b="0">
+                <a:solidFill>
+                  <a:srgbClr val="98A1B6"/>
+                </a:solidFill>
+                <a:latin typeface="Menlo"/>
+              </a:rPr>
+              <a:t>1 value per segment</a:t>
+            </a:r>
+          </a:p>
+        </p:txBody>
+      </p:sp>
+      <p:sp>
+        <p:nvSpPr>
+          <p:cNvPr id="10" name="Right Arrow 9"/>
+          <p:cNvSpPr/>
+          <p:nvPr/>
+        </p:nvSpPr>
+        <p:spPr>
+          <a:xfrm>
+            <a:off x="7077273" y="2487168"/>
+            <a:ext cx="256032" cy="237744"/>
+          </a:xfrm>
+          <a:prstGeom prst="rightArrow">
+            <a:avLst/>
+          </a:prstGeom>
+          <a:solidFill>
+            <a:srgbClr val="242A38"/>
+          </a:solidFill>
+          <a:ln>
+            <a:noFill/>
+          </a:ln>
+          <a:effectLst/>
+        </p:spPr>
+        <p:style>
+          <a:lnRef idx="1">
+            <a:schemeClr val="accent1"/>
+          </a:lnRef>
+          <a:fillRef idx="3">
+            <a:schemeClr val="accent1"/>
+          </a:fillRef>
+          <a:effectRef idx="2">
+            <a:schemeClr val="accent1"/>
+          </a:effectRef>
+          <a:fontRef idx="minor">
+            <a:schemeClr val="lt1"/>
+          </a:fontRef>
+        </p:style>
+        <p:txBody>
+          <a:bodyPr rtlCol="0" anchor="ctr"/>
+          <a:lstStyle/>
+          <a:p>
+            <a:pPr algn="ctr"/>
+          </a:p>
+        </p:txBody>
+      </p:sp>
+      <p:sp>
+        <p:nvSpPr>
+          <p:cNvPr id="11" name="Rounded Rectangle 10"/>
+          <p:cNvSpPr/>
+          <p:nvPr/>
+        </p:nvSpPr>
+        <p:spPr>
+          <a:xfrm>
+            <a:off x="7388169" y="1920240"/>
+            <a:ext cx="1853123" cy="1371600"/>
+          </a:xfrm>
+          <a:prstGeom prst="roundRect">
+            <a:avLst>
+              <a:gd name="adj" fmla="val 8000"/>
+            </a:avLst>
+          </a:prstGeom>
+          <a:solidFill>
+            <a:srgbClr val="131720"/>
+          </a:solidFill>
+          <a:ln w="15875">
+            <a:solidFill>
+              <a:srgbClr val="242A38"/>
+            </a:solidFill>
+          </a:ln>
+          <a:effectLst/>
+        </p:spPr>
+        <p:style>
+          <a:lnRef idx="1">
+            <a:schemeClr val="accent1"/>
+          </a:lnRef>
+          <a:fillRef idx="3">
+            <a:schemeClr val="accent1"/>
+          </a:fillRef>
+          <a:effectRef idx="2">
+            <a:schemeClr val="accent1"/>
+          </a:effectRef>
+          <a:fontRef idx="minor">
+            <a:schemeClr val="lt1"/>
+          </a:fontRef>
+        </p:style>
+        <p:txBody>
+          <a:bodyPr rtlCol="0" anchor="ctr" wrap="square" tIns="54864" bIns="54864"/>
+          <a:lstStyle/>
+          <a:p>
+            <a:pPr algn="ctr">
+              <a:lnSpc>
+                <a:spcPct val="115000"/>
+              </a:lnSpc>
+              <a:spcAft>
+                <a:spcPts val="200"/>
+              </a:spcAft>
+            </a:pPr>
+            <a:r>
+              <a:rPr sz="1300" b="1">
+                <a:solidFill>
+                  <a:srgbClr val="F2F5FB"/>
+                </a:solidFill>
+                <a:latin typeface="Helvetica Neue"/>
+              </a:rPr>
+              <a:t>CALL</a:t>
+            </a:r>
+          </a:p>
+          <a:p>
+            <a:pPr algn="ctr">
+              <a:lnSpc>
+                <a:spcPct val="115000"/>
+              </a:lnSpc>
+              <a:spcAft>
+                <a:spcPts val="200"/>
+              </a:spcAft>
+            </a:pPr>
+            <a:r>
+              <a:rPr sz="1050" b="0">
+                <a:solidFill>
+                  <a:srgbClr val="98A1B6"/>
+                </a:solidFill>
+                <a:latin typeface="Menlo"/>
+              </a:rPr>
+              <a:t>LiveKit</a:t>
+            </a:r>
+          </a:p>
+          <a:p>
+            <a:pPr algn="ctr">
+              <a:lnSpc>
+                <a:spcPct val="115000"/>
+              </a:lnSpc>
+              <a:spcAft>
+                <a:spcPts val="200"/>
+              </a:spcAft>
+            </a:pPr>
+            <a:r>
+              <a:rPr sz="1050" b="0">
+                <a:solidFill>
+                  <a:srgbClr val="98A1B6"/>
+                </a:solidFill>
+                <a:latin typeface="Menlo"/>
+              </a:rPr>
+              <a:t>/c/{id} · one tap</a:t>
+            </a:r>
+          </a:p>
+          <a:p>
+            <a:pPr algn="ctr">
+              <a:lnSpc>
+                <a:spcPct val="115000"/>
+              </a:lnSpc>
+              <a:spcAft>
+                <a:spcPts val="200"/>
+              </a:spcAft>
+            </a:pPr>
+            <a:r>
+              <a:rPr sz="1050" b="0">
+                <a:solidFill>
+                  <a:srgbClr val="98A1B6"/>
+                </a:solidFill>
+                <a:latin typeface="Menlo"/>
+              </a:rPr>
+              <a:t>Sarvam hears her</a:t>
+            </a:r>
+          </a:p>
+        </p:txBody>
+      </p:sp>
+      <p:sp>
+        <p:nvSpPr>
+          <p:cNvPr id="12" name="Right Arrow 11"/>
+          <p:cNvSpPr/>
+          <p:nvPr/>
+        </p:nvSpPr>
+        <p:spPr>
+          <a:xfrm>
+            <a:off x="9296156" y="2487168"/>
+            <a:ext cx="256032" cy="237744"/>
+          </a:xfrm>
+          <a:prstGeom prst="rightArrow">
+            <a:avLst/>
+          </a:prstGeom>
+          <a:solidFill>
+            <a:srgbClr val="242A38"/>
+          </a:solidFill>
+          <a:ln>
+            <a:noFill/>
+          </a:ln>
+          <a:effectLst/>
+        </p:spPr>
+        <p:style>
+          <a:lnRef idx="1">
+            <a:schemeClr val="accent1"/>
+          </a:lnRef>
+          <a:fillRef idx="3">
+            <a:schemeClr val="accent1"/>
+          </a:fillRef>
+          <a:effectRef idx="2">
+            <a:schemeClr val="accent1"/>
+          </a:effectRef>
+          <a:fontRef idx="minor">
+            <a:schemeClr val="lt1"/>
+          </a:fontRef>
+        </p:style>
+        <p:txBody>
+          <a:bodyPr rtlCol="0" anchor="ctr"/>
+          <a:lstStyle/>
+          <a:p>
+            <a:pPr algn="ctr"/>
+          </a:p>
+        </p:txBody>
+      </p:sp>
+      <p:sp>
+        <p:nvSpPr>
+          <p:cNvPr id="13" name="Rounded Rectangle 12"/>
+          <p:cNvSpPr/>
+          <p:nvPr/>
+        </p:nvSpPr>
+        <p:spPr>
+          <a:xfrm>
+            <a:off x="9607052" y="1920240"/>
+            <a:ext cx="1853123" cy="1371600"/>
+          </a:xfrm>
+          <a:prstGeom prst="roundRect">
+            <a:avLst>
+              <a:gd name="adj" fmla="val 8000"/>
+            </a:avLst>
+          </a:prstGeom>
+          <a:solidFill>
+            <a:srgbClr val="131720"/>
+          </a:solidFill>
+          <a:ln w="15875">
+            <a:solidFill>
+              <a:srgbClr val="FFB020"/>
+            </a:solidFill>
+          </a:ln>
+          <a:effectLst/>
+        </p:spPr>
+        <p:style>
+          <a:lnRef idx="1">
+            <a:schemeClr val="accent1"/>
+          </a:lnRef>
+          <a:fillRef idx="3">
+            <a:schemeClr val="accent1"/>
+          </a:fillRef>
+          <a:effectRef idx="2">
+            <a:schemeClr val="accent1"/>
+          </a:effectRef>
+          <a:fontRef idx="minor">
+            <a:schemeClr val="lt1"/>
+          </a:fontRef>
+        </p:style>
+        <p:txBody>
+          <a:bodyPr rtlCol="0" anchor="ctr" wrap="square" tIns="54864" bIns="54864"/>
+          <a:lstStyle/>
+          <a:p>
+            <a:pPr algn="ctr">
+              <a:lnSpc>
+                <a:spcPct val="115000"/>
+              </a:lnSpc>
+              <a:spcAft>
+                <a:spcPts val="200"/>
+              </a:spcAft>
+            </a:pPr>
+            <a:r>
+              <a:rPr sz="1300" b="1">
+                <a:solidFill>
+                  <a:srgbClr val="F2F5FB"/>
+                </a:solidFill>
+                <a:latin typeface="Helvetica Neue"/>
+              </a:rPr>
+              <a:t>RECORD</a:t>
+            </a:r>
+          </a:p>
+          <a:p>
+            <a:pPr algn="ctr">
+              <a:lnSpc>
+                <a:spcPct val="115000"/>
+              </a:lnSpc>
+              <a:spcAft>
+                <a:spcPts val="200"/>
+              </a:spcAft>
+            </a:pPr>
+            <a:r>
+              <a:rPr sz="1050" b="0">
+                <a:solidFill>
+                  <a:srgbClr val="98A1B6"/>
+                </a:solidFill>
+                <a:latin typeface="Menlo"/>
+              </a:rPr>
+              <a:t>sha256-sealed</a:t>
+            </a:r>
+          </a:p>
+          <a:p>
+            <a:pPr algn="ctr">
+              <a:lnSpc>
+                <a:spcPct val="115000"/>
+              </a:lnSpc>
+              <a:spcAft>
+                <a:spcPts val="200"/>
+              </a:spcAft>
+            </a:pPr>
+            <a:r>
+              <a:rPr sz="1050" b="0">
+                <a:solidFill>
+                  <a:srgbClr val="98A1B6"/>
+                </a:solidFill>
+                <a:latin typeface="Menlo"/>
+              </a:rPr>
+              <a:t>+ doc provenance</a:t>
+            </a:r>
+          </a:p>
+        </p:txBody>
+      </p:sp>
+      <p:sp>
+        <p:nvSpPr>
+          <p:cNvPr id="14" name="Rounded Rectangle 13"/>
+          <p:cNvSpPr/>
+          <p:nvPr/>
+        </p:nvSpPr>
+        <p:spPr>
+          <a:xfrm>
+            <a:off x="731520" y="3657600"/>
+            <a:ext cx="10728655" cy="2057400"/>
+          </a:xfrm>
+          <a:prstGeom prst="roundRect">
+            <a:avLst>
+              <a:gd name="adj" fmla="val 6000"/>
+            </a:avLst>
+          </a:prstGeom>
+          <a:solidFill>
+            <a:srgbClr val="131720"/>
+          </a:solidFill>
+          <a:ln w="19050">
+            <a:solidFill>
+              <a:srgbClr val="1DB954"/>
+            </a:solidFill>
+          </a:ln>
+          <a:effectLst/>
+        </p:spPr>
+        <p:style>
+          <a:lnRef idx="1">
+            <a:schemeClr val="accent1"/>
+          </a:lnRef>
+          <a:fillRef idx="3">
+            <a:schemeClr val="accent1"/>
+          </a:fillRef>
+          <a:effectRef idx="2">
+            <a:schemeClr val="accent1"/>
+          </a:effectRef>
+          <a:fontRef idx="minor">
+            <a:schemeClr val="lt1"/>
+          </a:fontRef>
+        </p:style>
+        <p:txBody>
+          <a:bodyPr rtlCol="0" anchor="ctr"/>
+          <a:lstStyle/>
+          <a:p/>
+        </p:txBody>
+      </p:sp>
+      <p:sp>
+        <p:nvSpPr>
+          <p:cNvPr id="15" name="TextBox 14"/>
           <p:cNvSpPr txBox="1"/>
           <p:nvPr/>
         </p:nvSpPr>
         <p:spPr>
           <a:xfrm>
-            <a:off x="731520" y="5984747"/>
-            <a:ext cx="6400800" cy="457200"/>
+            <a:off x="960120" y="3840480"/>
+            <a:ext cx="10058400" cy="274320"/>
           </a:xfrm>
           <a:prstGeom prst="rect">
             <a:avLst/>
@@ -5583,34 +5357,574 @@
           <a:p>
             <a:pPr algn="l">
               <a:lnSpc>
-                <a:spcPct val="120000"/>
+                <a:spcPct val="125000"/>
               </a:lnSpc>
               <a:spcAft>
                 <a:spcPts val="600"/>
               </a:spcAft>
             </a:pPr>
             <a:r>
-              <a:rPr sz="1200" b="0">
+              <a:rPr sz="1100" b="0">
+                <a:solidFill>
+                  <a:srgbClr val="1DB954"/>
+                </a:solidFill>
+                <a:latin typeface="Helvetica Neue"/>
+              </a:rPr>
+              <a:t>THE ONE EDGE THAT IS THE PRODUCT</a:t>
+            </a:r>
+          </a:p>
+        </p:txBody>
+      </p:sp>
+      <p:sp>
+        <p:nvSpPr>
+          <p:cNvPr id="16" name="Rounded Rectangle 15"/>
+          <p:cNvSpPr/>
+          <p:nvPr/>
+        </p:nvSpPr>
+        <p:spPr>
+          <a:xfrm>
+            <a:off x="960120" y="4251960"/>
+            <a:ext cx="2313432" cy="1234440"/>
+          </a:xfrm>
+          <a:prstGeom prst="roundRect">
+            <a:avLst>
+              <a:gd name="adj" fmla="val 8000"/>
+            </a:avLst>
+          </a:prstGeom>
+          <a:solidFill>
+            <a:srgbClr val="0B0D12"/>
+          </a:solidFill>
+          <a:ln w="15875">
+            <a:solidFill>
+              <a:srgbClr val="1DB954"/>
+            </a:solidFill>
+          </a:ln>
+          <a:effectLst/>
+        </p:spPr>
+        <p:style>
+          <a:lnRef idx="1">
+            <a:schemeClr val="accent1"/>
+          </a:lnRef>
+          <a:fillRef idx="3">
+            <a:schemeClr val="accent1"/>
+          </a:fillRef>
+          <a:effectRef idx="2">
+            <a:schemeClr val="accent1"/>
+          </a:effectRef>
+          <a:fontRef idx="minor">
+            <a:schemeClr val="lt1"/>
+          </a:fontRef>
+        </p:style>
+        <p:txBody>
+          <a:bodyPr rtlCol="0" anchor="ctr" wrap="square" tIns="54864" bIns="54864"/>
+          <a:lstStyle/>
+          <a:p>
+            <a:pPr algn="ctr">
+              <a:lnSpc>
+                <a:spcPct val="115000"/>
+              </a:lnSpc>
+              <a:spcAft>
+                <a:spcPts val="200"/>
+              </a:spcAft>
+            </a:pPr>
+            <a:r>
+              <a:rPr sz="1200" b="1">
+                <a:solidFill>
+                  <a:srgbClr val="F2F5FB"/>
+                </a:solidFill>
+                <a:latin typeface="Helvetica Neue"/>
+              </a:rPr>
+              <a:t>Rime's bytes</a:t>
+            </a:r>
+          </a:p>
+          <a:p>
+            <a:pPr algn="ctr">
+              <a:lnSpc>
+                <a:spcPct val="115000"/>
+              </a:lnSpc>
+              <a:spcAft>
+                <a:spcPts val="200"/>
+              </a:spcAft>
+            </a:pPr>
+            <a:r>
+              <a:rPr sz="950" b="0">
                 <a:solidFill>
                   <a:srgbClr val="98A1B6"/>
                 </a:solidFill>
+                <a:latin typeface="Menlo"/>
+              </a:rPr>
+              <a:t>8000 B = 1.000 s</a:t>
+            </a:r>
+          </a:p>
+          <a:p>
+            <a:pPr algn="ctr">
+              <a:lnSpc>
+                <a:spcPct val="115000"/>
+              </a:lnSpc>
+              <a:spcAft>
+                <a:spcPts val="200"/>
+              </a:spcAft>
+            </a:pPr>
+            <a:r>
+              <a:rPr sz="950" b="0">
+                <a:solidFill>
+                  <a:srgbClr val="98A1B6"/>
+                </a:solidFill>
+                <a:latin typeface="Menlo"/>
+              </a:rPr>
+              <a:t>exact, not estimated</a:t>
+            </a:r>
+          </a:p>
+        </p:txBody>
+      </p:sp>
+      <p:sp>
+        <p:nvSpPr>
+          <p:cNvPr id="17" name="Right Arrow 16"/>
+          <p:cNvSpPr/>
+          <p:nvPr/>
+        </p:nvSpPr>
+        <p:spPr>
+          <a:xfrm>
+            <a:off x="3319272" y="4759452"/>
+            <a:ext cx="237744" cy="219456"/>
+          </a:xfrm>
+          <a:prstGeom prst="rightArrow">
+            <a:avLst/>
+          </a:prstGeom>
+          <a:solidFill>
+            <a:srgbClr val="1DB954"/>
+          </a:solidFill>
+          <a:ln>
+            <a:noFill/>
+          </a:ln>
+          <a:effectLst/>
+        </p:spPr>
+        <p:style>
+          <a:lnRef idx="1">
+            <a:schemeClr val="accent1"/>
+          </a:lnRef>
+          <a:fillRef idx="3">
+            <a:schemeClr val="accent1"/>
+          </a:fillRef>
+          <a:effectRef idx="2">
+            <a:schemeClr val="accent1"/>
+          </a:effectRef>
+          <a:fontRef idx="minor">
+            <a:schemeClr val="lt1"/>
+          </a:fontRef>
+        </p:style>
+        <p:txBody>
+          <a:bodyPr rtlCol="0" anchor="ctr"/>
+          <a:lstStyle/>
+          <a:p>
+            <a:pPr algn="ctr"/>
+          </a:p>
+        </p:txBody>
+      </p:sp>
+      <p:sp>
+        <p:nvSpPr>
+          <p:cNvPr id="18" name="Rounded Rectangle 17"/>
+          <p:cNvSpPr/>
+          <p:nvPr/>
+        </p:nvSpPr>
+        <p:spPr>
+          <a:xfrm>
+            <a:off x="3602736" y="4251960"/>
+            <a:ext cx="2313432" cy="1234440"/>
+          </a:xfrm>
+          <a:prstGeom prst="roundRect">
+            <a:avLst>
+              <a:gd name="adj" fmla="val 8000"/>
+            </a:avLst>
+          </a:prstGeom>
+          <a:solidFill>
+            <a:srgbClr val="0B0D12"/>
+          </a:solidFill>
+          <a:ln w="15875">
+            <a:solidFill>
+              <a:srgbClr val="FFB020"/>
+            </a:solidFill>
+          </a:ln>
+          <a:effectLst/>
+        </p:spPr>
+        <p:style>
+          <a:lnRef idx="1">
+            <a:schemeClr val="accent1"/>
+          </a:lnRef>
+          <a:fillRef idx="3">
+            <a:schemeClr val="accent1"/>
+          </a:fillRef>
+          <a:effectRef idx="2">
+            <a:schemeClr val="accent1"/>
+          </a:effectRef>
+          <a:fontRef idx="minor">
+            <a:schemeClr val="lt1"/>
+          </a:fontRef>
+        </p:style>
+        <p:txBody>
+          <a:bodyPr rtlCol="0" anchor="ctr" wrap="square" tIns="54864" bIns="54864"/>
+          <a:lstStyle/>
+          <a:p>
+            <a:pPr algn="ctr">
+              <a:lnSpc>
+                <a:spcPct val="115000"/>
+              </a:lnSpc>
+              <a:spcAft>
+                <a:spcPts val="200"/>
+              </a:spcAft>
+            </a:pPr>
+            <a:r>
+              <a:rPr sz="1200" b="1">
+                <a:solidFill>
+                  <a:srgbClr val="F2F5FB"/>
+                </a:solidFill>
                 <a:latin typeface="Helvetica Neue"/>
               </a:rPr>
-              <a:t>The Hindi that will actually be spoken, with each value's spoken form.</a:t>
-            </a:r>
-          </a:p>
-        </p:txBody>
-      </p:sp>
-      <p:sp>
-        <p:nvSpPr>
-          <p:cNvPr id="7" name="TextBox 6"/>
+              <a:t>HEARD?</a:t>
+            </a:r>
+          </a:p>
+          <a:p>
+            <a:pPr algn="ctr">
+              <a:lnSpc>
+                <a:spcPct val="115000"/>
+              </a:lnSpc>
+              <a:spcAft>
+                <a:spcPts val="200"/>
+              </a:spcAft>
+            </a:pPr>
+            <a:r>
+              <a:rPr sz="950" b="0">
+                <a:solidFill>
+                  <a:srgbClr val="98A1B6"/>
+                </a:solidFill>
+                <a:latin typeface="Menlo"/>
+              </a:rPr>
+              <a:t>did THIS number's</a:t>
+            </a:r>
+          </a:p>
+          <a:p>
+            <a:pPr algn="ctr">
+              <a:lnSpc>
+                <a:spcPct val="115000"/>
+              </a:lnSpc>
+              <a:spcAft>
+                <a:spcPts val="200"/>
+              </a:spcAft>
+            </a:pPr>
+            <a:r>
+              <a:rPr sz="950" b="0">
+                <a:solidFill>
+                  <a:srgbClr val="98A1B6"/>
+                </a:solidFill>
+                <a:latin typeface="Menlo"/>
+              </a:rPr>
+              <a:t>segment finish?</a:t>
+            </a:r>
+          </a:p>
+        </p:txBody>
+      </p:sp>
+      <p:sp>
+        <p:nvSpPr>
+          <p:cNvPr id="19" name="Right Arrow 18"/>
+          <p:cNvSpPr/>
+          <p:nvPr/>
+        </p:nvSpPr>
+        <p:spPr>
+          <a:xfrm>
+            <a:off x="5961888" y="4759452"/>
+            <a:ext cx="237744" cy="219456"/>
+          </a:xfrm>
+          <a:prstGeom prst="rightArrow">
+            <a:avLst/>
+          </a:prstGeom>
+          <a:solidFill>
+            <a:srgbClr val="1DB954"/>
+          </a:solidFill>
+          <a:ln>
+            <a:noFill/>
+          </a:ln>
+          <a:effectLst/>
+        </p:spPr>
+        <p:style>
+          <a:lnRef idx="1">
+            <a:schemeClr val="accent1"/>
+          </a:lnRef>
+          <a:fillRef idx="3">
+            <a:schemeClr val="accent1"/>
+          </a:fillRef>
+          <a:effectRef idx="2">
+            <a:schemeClr val="accent1"/>
+          </a:effectRef>
+          <a:fontRef idx="minor">
+            <a:schemeClr val="lt1"/>
+          </a:fontRef>
+        </p:style>
+        <p:txBody>
+          <a:bodyPr rtlCol="0" anchor="ctr"/>
+          <a:lstStyle/>
+          <a:p>
+            <a:pPr algn="ctr"/>
+          </a:p>
+        </p:txBody>
+      </p:sp>
+      <p:sp>
+        <p:nvSpPr>
+          <p:cNvPr id="20" name="Rounded Rectangle 19"/>
+          <p:cNvSpPr/>
+          <p:nvPr/>
+        </p:nvSpPr>
+        <p:spPr>
+          <a:xfrm>
+            <a:off x="6245352" y="4251960"/>
+            <a:ext cx="2313432" cy="1234440"/>
+          </a:xfrm>
+          <a:prstGeom prst="roundRect">
+            <a:avLst>
+              <a:gd name="adj" fmla="val 8000"/>
+            </a:avLst>
+          </a:prstGeom>
+          <a:solidFill>
+            <a:srgbClr val="0B0D12"/>
+          </a:solidFill>
+          <a:ln w="15875">
+            <a:solidFill>
+              <a:srgbClr val="FFB020"/>
+            </a:solidFill>
+          </a:ln>
+          <a:effectLst/>
+        </p:spPr>
+        <p:style>
+          <a:lnRef idx="1">
+            <a:schemeClr val="accent1"/>
+          </a:lnRef>
+          <a:fillRef idx="3">
+            <a:schemeClr val="accent1"/>
+          </a:fillRef>
+          <a:effectRef idx="2">
+            <a:schemeClr val="accent1"/>
+          </a:effectRef>
+          <a:fontRef idx="minor">
+            <a:schemeClr val="lt1"/>
+          </a:fontRef>
+        </p:style>
+        <p:txBody>
+          <a:bodyPr rtlCol="0" anchor="ctr" wrap="square" tIns="54864" bIns="54864"/>
+          <a:lstStyle/>
+          <a:p>
+            <a:pPr algn="ctr">
+              <a:lnSpc>
+                <a:spcPct val="115000"/>
+              </a:lnSpc>
+              <a:spcAft>
+                <a:spcPts val="200"/>
+              </a:spcAft>
+            </a:pPr>
+            <a:r>
+              <a:rPr sz="1200" b="1">
+                <a:solidFill>
+                  <a:srgbClr val="F2F5FB"/>
+                </a:solidFill>
+                <a:latin typeface="Helvetica Neue"/>
+              </a:rPr>
+              <a:t>UNDERSTOOD?</a:t>
+            </a:r>
+          </a:p>
+          <a:p>
+            <a:pPr algn="ctr">
+              <a:lnSpc>
+                <a:spcPct val="115000"/>
+              </a:lnSpc>
+              <a:spcAft>
+                <a:spcPts val="200"/>
+              </a:spcAft>
+            </a:pPr>
+            <a:r>
+              <a:rPr sz="950" b="0">
+                <a:solidFill>
+                  <a:srgbClr val="98A1B6"/>
+                </a:solidFill>
+                <a:latin typeface="Menlo"/>
+              </a:rPr>
+              <a:t>she says it back</a:t>
+            </a:r>
+          </a:p>
+          <a:p>
+            <a:pPr algn="ctr">
+              <a:lnSpc>
+                <a:spcPct val="115000"/>
+              </a:lnSpc>
+              <a:spcAft>
+                <a:spcPts val="200"/>
+              </a:spcAft>
+            </a:pPr>
+            <a:r>
+              <a:rPr sz="950" b="0">
+                <a:solidFill>
+                  <a:srgbClr val="98A1B6"/>
+                </a:solidFill>
+                <a:latin typeface="Menlo"/>
+              </a:rPr>
+              <a:t>in her own words</a:t>
+            </a:r>
+          </a:p>
+        </p:txBody>
+      </p:sp>
+      <p:sp>
+        <p:nvSpPr>
+          <p:cNvPr id="21" name="Right Arrow 20"/>
+          <p:cNvSpPr/>
+          <p:nvPr/>
+        </p:nvSpPr>
+        <p:spPr>
+          <a:xfrm>
+            <a:off x="8604504" y="4759452"/>
+            <a:ext cx="237744" cy="219456"/>
+          </a:xfrm>
+          <a:prstGeom prst="rightArrow">
+            <a:avLst/>
+          </a:prstGeom>
+          <a:solidFill>
+            <a:srgbClr val="1DB954"/>
+          </a:solidFill>
+          <a:ln>
+            <a:noFill/>
+          </a:ln>
+          <a:effectLst/>
+        </p:spPr>
+        <p:style>
+          <a:lnRef idx="1">
+            <a:schemeClr val="accent1"/>
+          </a:lnRef>
+          <a:fillRef idx="3">
+            <a:schemeClr val="accent1"/>
+          </a:fillRef>
+          <a:effectRef idx="2">
+            <a:schemeClr val="accent1"/>
+          </a:effectRef>
+          <a:fontRef idx="minor">
+            <a:schemeClr val="lt1"/>
+          </a:fontRef>
+        </p:style>
+        <p:txBody>
+          <a:bodyPr rtlCol="0" anchor="ctr"/>
+          <a:lstStyle/>
+          <a:p>
+            <a:pPr algn="ctr"/>
+          </a:p>
+        </p:txBody>
+      </p:sp>
+      <p:sp>
+        <p:nvSpPr>
+          <p:cNvPr id="22" name="Rounded Rectangle 21"/>
+          <p:cNvSpPr/>
+          <p:nvPr/>
+        </p:nvSpPr>
+        <p:spPr>
+          <a:xfrm>
+            <a:off x="8887968" y="4251960"/>
+            <a:ext cx="2313432" cy="1234440"/>
+          </a:xfrm>
+          <a:prstGeom prst="roundRect">
+            <a:avLst>
+              <a:gd name="adj" fmla="val 8000"/>
+            </a:avLst>
+          </a:prstGeom>
+          <a:solidFill>
+            <a:srgbClr val="0B0D12"/>
+          </a:solidFill>
+          <a:ln w="15875">
+            <a:solidFill>
+              <a:srgbClr val="FF5C5C"/>
+            </a:solidFill>
+          </a:ln>
+          <a:effectLst/>
+        </p:spPr>
+        <p:style>
+          <a:lnRef idx="1">
+            <a:schemeClr val="accent1"/>
+          </a:lnRef>
+          <a:fillRef idx="3">
+            <a:schemeClr val="accent1"/>
+          </a:fillRef>
+          <a:effectRef idx="2">
+            <a:schemeClr val="accent1"/>
+          </a:effectRef>
+          <a:fontRef idx="minor">
+            <a:schemeClr val="lt1"/>
+          </a:fontRef>
+        </p:style>
+        <p:txBody>
+          <a:bodyPr rtlCol="0" anchor="ctr" wrap="square" tIns="54864" bIns="54864"/>
+          <a:lstStyle/>
+          <a:p>
+            <a:pPr algn="ctr">
+              <a:lnSpc>
+                <a:spcPct val="115000"/>
+              </a:lnSpc>
+              <a:spcAft>
+                <a:spcPts val="200"/>
+              </a:spcAft>
+            </a:pPr>
+            <a:r>
+              <a:rPr sz="1200" b="1">
+                <a:solidFill>
+                  <a:srgbClr val="F2F5FB"/>
+                </a:solidFill>
+                <a:latin typeface="Helvetica Neue"/>
+              </a:rPr>
+              <a:t>REFUSED / RECORDED</a:t>
+            </a:r>
+          </a:p>
+          <a:p>
+            <a:pPr algn="ctr">
+              <a:lnSpc>
+                <a:spcPct val="115000"/>
+              </a:lnSpc>
+              <a:spcAft>
+                <a:spcPts val="200"/>
+              </a:spcAft>
+            </a:pPr>
+            <a:r>
+              <a:rPr sz="950" b="0">
+                <a:solidFill>
+                  <a:srgbClr val="98A1B6"/>
+                </a:solidFill>
+                <a:latin typeface="Menlo"/>
+              </a:rPr>
+              <a:t>both true, every value</a:t>
+            </a:r>
+          </a:p>
+          <a:p>
+            <a:pPr algn="ctr">
+              <a:lnSpc>
+                <a:spcPct val="115000"/>
+              </a:lnSpc>
+              <a:spcAft>
+                <a:spcPts val="200"/>
+              </a:spcAft>
+            </a:pPr>
+            <a:r>
+              <a:rPr sz="950" b="0">
+                <a:solidFill>
+                  <a:srgbClr val="98A1B6"/>
+                </a:solidFill>
+                <a:latin typeface="Menlo"/>
+              </a:rPr>
+              <a:t>or consent is blocked</a:t>
+            </a:r>
+          </a:p>
+        </p:txBody>
+      </p:sp>
+      <p:sp>
+        <p:nvSpPr>
+          <p:cNvPr id="23" name="TextBox 22"/>
           <p:cNvSpPr txBox="1"/>
           <p:nvPr/>
         </p:nvSpPr>
         <p:spPr>
           <a:xfrm>
-            <a:off x="7452360" y="2011680"/>
-            <a:ext cx="4114800" cy="914400"/>
+            <a:off x="731520" y="5897880"/>
+            <a:ext cx="10728655" cy="457200"/>
           </a:xfrm>
           <a:prstGeom prst="rect">
             <a:avLst/>
@@ -5625,7 +5939,7 @@
           <a:p>
             <a:pPr algn="l">
               <a:lnSpc>
-                <a:spcPct val="125000"/>
+                <a:spcPct val="120000"/>
               </a:lnSpc>
               <a:spcAft>
                 <a:spcPts val="600"/>
@@ -5634,137 +5948,11 @@
             <a:r>
               <a:rPr sz="1300" b="0">
                 <a:solidFill>
-                  <a:srgbClr val="F2F5FB"/>
+                  <a:srgbClr val="98A1B6"/>
                 </a:solidFill>
                 <a:latin typeface="Helvetica Neue"/>
               </a:rPr>
-              <a:t>·  A lender's own wording is absorbed — “APR (%)”, “Loan Proposal No.”</a:t>
-            </a:r>
-          </a:p>
-        </p:txBody>
-      </p:sp>
-      <p:sp>
-        <p:nvSpPr>
-          <p:cNvPr id="8" name="TextBox 7"/>
-          <p:cNvSpPr txBox="1"/>
-          <p:nvPr/>
-        </p:nvSpPr>
-        <p:spPr>
-          <a:xfrm>
-            <a:off x="7452360" y="2926080"/>
-            <a:ext cx="4114800" cy="914400"/>
-          </a:xfrm>
-          <a:prstGeom prst="rect">
-            <a:avLst/>
-          </a:prstGeom>
-          <a:noFill/>
-        </p:spPr>
-        <p:txBody>
-          <a:bodyPr wrap="square" lIns="0" rIns="0" tIns="0" bIns="0">
-            <a:spAutoFit/>
-          </a:bodyPr>
-          <a:lstStyle/>
-          <a:p>
-            <a:pPr algn="l">
-              <a:lnSpc>
-                <a:spcPct val="125000"/>
-              </a:lnSpc>
-              <a:spcAft>
-                <a:spcPts val="600"/>
-              </a:spcAft>
-            </a:pPr>
-            <a:r>
-              <a:rPr sz="1300" b="0">
-                <a:solidFill>
-                  <a:srgbClr val="FFB020"/>
-                </a:solidFill>
-                <a:latin typeface="Helvetica Neue"/>
-              </a:rPr>
-              <a:t>·  A label we do not recognise is REPORTED, never folded into a real field</a:t>
-            </a:r>
-          </a:p>
-        </p:txBody>
-      </p:sp>
-      <p:sp>
-        <p:nvSpPr>
-          <p:cNvPr id="9" name="TextBox 8"/>
-          <p:cNvSpPr txBox="1"/>
-          <p:nvPr/>
-        </p:nvSpPr>
-        <p:spPr>
-          <a:xfrm>
-            <a:off x="7452360" y="3840480"/>
-            <a:ext cx="4114800" cy="914400"/>
-          </a:xfrm>
-          <a:prstGeom prst="rect">
-            <a:avLst/>
-          </a:prstGeom>
-          <a:noFill/>
-        </p:spPr>
-        <p:txBody>
-          <a:bodyPr wrap="square" lIns="0" rIns="0" tIns="0" bIns="0">
-            <a:spAutoFit/>
-          </a:bodyPr>
-          <a:lstStyle/>
-          <a:p>
-            <a:pPr algn="l">
-              <a:lnSpc>
-                <a:spcPct val="125000"/>
-              </a:lnSpc>
-              <a:spcAft>
-                <a:spcPts val="600"/>
-              </a:spcAft>
-            </a:pPr>
-            <a:r>
-              <a:rPr sz="1300" b="0">
-                <a:solidFill>
-                  <a:srgbClr val="FFB020"/>
-                </a:solidFill>
-                <a:latin typeface="Helvetica Neue"/>
-              </a:rPr>
-              <a:t>·  A required field the document lacks BLOCKS the call until a human types it</a:t>
-            </a:r>
-          </a:p>
-        </p:txBody>
-      </p:sp>
-      <p:sp>
-        <p:nvSpPr>
-          <p:cNvPr id="10" name="TextBox 9"/>
-          <p:cNvSpPr txBox="1"/>
-          <p:nvPr/>
-        </p:nvSpPr>
-        <p:spPr>
-          <a:xfrm>
-            <a:off x="7452360" y="4937760"/>
-            <a:ext cx="4114800" cy="1463040"/>
-          </a:xfrm>
-          <a:prstGeom prst="rect">
-            <a:avLst/>
-          </a:prstGeom>
-          <a:noFill/>
-        </p:spPr>
-        <p:txBody>
-          <a:bodyPr wrap="square" lIns="0" rIns="0" tIns="0" bIns="0">
-            <a:spAutoFit/>
-          </a:bodyPr>
-          <a:lstStyle/>
-          <a:p>
-            <a:pPr algn="l">
-              <a:lnSpc>
-                <a:spcPct val="125000"/>
-              </a:lnSpc>
-              <a:spcAft>
-                <a:spcPts val="600"/>
-              </a:spcAft>
-            </a:pPr>
-            <a:r>
-              <a:rPr sz="1200" b="0">
-                <a:solidFill>
-                  <a:srgbClr val="98A1B6"/>
-                </a:solidFill>
-                <a:latin typeface="Helvetica Neue"/>
-              </a:rPr>
-              <a:t>Because a missing cooling-off period would otherwise default to 0 — and be read aloud as “इस लोन में कूलिंग-ऑफ की अवधि नहीं है”, denying a statutory right the document may well grant.</a:t>
+              <a:t>No vendor word timestamps — Rime emits none for Hindi. No model in the loop. Arithmetic over Rime's own output, cross-checked against LiveKit's measured playout.</a:t>
             </a:r>
           </a:p>
         </p:txBody>
@@ -5803,8 +5991,8 @@
         </p:nvSpPr>
         <p:spPr>
           <a:xfrm>
-            <a:off x="731520" y="502920"/>
-            <a:ext cx="10058400" cy="274320"/>
+            <a:off x="822960" y="685800"/>
+            <a:ext cx="10058400" cy="1280160"/>
           </a:xfrm>
           <a:prstGeom prst="rect">
             <a:avLst/>
@@ -5826,13 +6014,13 @@
               </a:spcAft>
             </a:pPr>
             <a:r>
-              <a:rPr sz="1200" b="0">
-                <a:solidFill>
-                  <a:srgbClr val="98A1B6"/>
+              <a:rPr sz="8800" b="1">
+                <a:solidFill>
+                  <a:srgbClr val="1DB954"/>
                 </a:solidFill>
                 <a:latin typeface="Helvetica Neue"/>
               </a:rPr>
-              <a:t>THE BORROWER  ·  /C/{CALL_ID}</a:t>
+              <a:t>DEMO</a:t>
             </a:r>
           </a:p>
         </p:txBody>
@@ -5845,8 +6033,8 @@
         </p:nvSpPr>
         <p:spPr>
           <a:xfrm>
-            <a:off x="731520" y="822960"/>
-            <a:ext cx="10698480" cy="822960"/>
+            <a:off x="868680" y="2011680"/>
+            <a:ext cx="10698480" cy="457200"/>
           </a:xfrm>
           <a:prstGeom prst="rect">
             <a:avLst/>
@@ -5868,64 +6056,20 @@
               </a:spcAft>
             </a:pPr>
             <a:r>
-              <a:rPr sz="3200" b="1">
-                <a:solidFill>
-                  <a:srgbClr val="F2F5FB"/>
+              <a:rPr sz="1900" b="0">
+                <a:solidFill>
+                  <a:srgbClr val="98A1B6"/>
                 </a:solidFill>
                 <a:latin typeface="Helvetica Neue"/>
               </a:rPr>
-              <a:t>One tap. Everything else is spoken.</a:t>
-            </a:r>
-          </a:p>
-        </p:txBody>
-      </p:sp>
-      <p:sp>
-        <p:nvSpPr>
-          <p:cNvPr id="4" name="Rectangle 3"/>
-          <p:cNvSpPr/>
-          <p:nvPr/>
-        </p:nvSpPr>
-        <p:spPr>
-          <a:xfrm>
-            <a:off x="731520" y="1572768"/>
-            <a:ext cx="1463040" cy="19050"/>
-          </a:xfrm>
-          <a:prstGeom prst="rect">
-            <a:avLst/>
-          </a:prstGeom>
-          <a:solidFill>
-            <a:srgbClr val="1DB954"/>
-          </a:solidFill>
-          <a:ln>
-            <a:noFill/>
-          </a:ln>
-          <a:effectLst/>
-        </p:spPr>
-        <p:style>
-          <a:lnRef idx="1">
-            <a:schemeClr val="accent1"/>
-          </a:lnRef>
-          <a:fillRef idx="3">
-            <a:schemeClr val="accent1"/>
-          </a:fillRef>
-          <a:effectRef idx="2">
-            <a:schemeClr val="accent1"/>
-          </a:effectRef>
-          <a:fontRef idx="minor">
-            <a:schemeClr val="lt1"/>
-          </a:fontRef>
-        </p:style>
-        <p:txBody>
-          <a:bodyPr rtlCol="0" anchor="ctr"/>
-          <a:lstStyle/>
-          <a:p>
-            <a:pPr algn="ctr"/>
+              <a:t>Upload a real KFS  ·  take the call in Hindi  ·  interrupt the account number  ·  read the refusal</a:t>
+            </a:r>
           </a:p>
         </p:txBody>
       </p:sp>
       <p:pic>
         <p:nvPicPr>
-          <p:cNvPr id="5" name="Picture 4" descr="borrower_ready.png"/>
+          <p:cNvPr id="4" name="Picture 3" descr="intake_clauses.png"/>
           <p:cNvPicPr>
             <a:picLocks noChangeAspect="1"/>
           </p:cNvPicPr>
@@ -5939,8 +6083,8 @@
         </p:blipFill>
         <p:spPr>
           <a:xfrm>
-            <a:off x="731520" y="1920240"/>
-            <a:ext cx="5120640" cy="3200400"/>
+            <a:off x="822960" y="2834640"/>
+            <a:ext cx="3429000" cy="2143125"/>
           </a:xfrm>
           <a:prstGeom prst="rect">
             <a:avLst/>
@@ -5954,14 +6098,14 @@
       </p:pic>
       <p:sp>
         <p:nvSpPr>
-          <p:cNvPr id="6" name="TextBox 5"/>
+          <p:cNvPr id="5" name="TextBox 4"/>
           <p:cNvSpPr txBox="1"/>
           <p:nvPr/>
         </p:nvSpPr>
         <p:spPr>
           <a:xfrm>
-            <a:off x="6309360" y="2011680"/>
-            <a:ext cx="5212080" cy="914400"/>
+            <a:off x="822960" y="5087493"/>
+            <a:ext cx="3429000" cy="457200"/>
           </a:xfrm>
           <a:prstGeom prst="rect">
             <a:avLst/>
@@ -5976,24 +6120,53 @@
           <a:p>
             <a:pPr algn="l">
               <a:lnSpc>
-                <a:spcPct val="125000"/>
+                <a:spcPct val="120000"/>
               </a:lnSpc>
               <a:spcAft>
                 <a:spcPts val="600"/>
               </a:spcAft>
             </a:pPr>
             <a:r>
-              <a:rPr sz="1400" b="0">
-                <a:solidFill>
-                  <a:srgbClr val="F2F5FB"/>
+              <a:rPr sz="1200" b="0">
+                <a:solidFill>
+                  <a:srgbClr val="98A1B6"/>
                 </a:solidFill>
                 <a:latin typeface="Helvetica Neue"/>
               </a:rPr>
-              <a:t>·  No file input. No text input. No navigation.</a:t>
-            </a:r>
-          </a:p>
-        </p:txBody>
-      </p:sp>
+              <a:t>/ — the officer</a:t>
+            </a:r>
+          </a:p>
+        </p:txBody>
+      </p:sp>
+      <p:pic>
+        <p:nvPicPr>
+          <p:cNvPr id="6" name="Picture 5" descr="borrower_ready.png"/>
+          <p:cNvPicPr>
+            <a:picLocks noChangeAspect="1"/>
+          </p:cNvPicPr>
+          <p:nvPr/>
+        </p:nvPicPr>
+        <p:blipFill>
+          <a:blip r:embed="rId3"/>
+          <a:stretch>
+            <a:fillRect/>
+          </a:stretch>
+        </p:blipFill>
+        <p:spPr>
+          <a:xfrm>
+            <a:off x="4544568" y="2834640"/>
+            <a:ext cx="3429000" cy="2143125"/>
+          </a:xfrm>
+          <a:prstGeom prst="rect">
+            <a:avLst/>
+          </a:prstGeom>
+          <a:ln w="12700">
+            <a:solidFill>
+              <a:srgbClr val="242A38"/>
+            </a:solidFill>
+          </a:ln>
+        </p:spPr>
+      </p:pic>
       <p:sp>
         <p:nvSpPr>
           <p:cNvPr id="7" name="TextBox 6"/>
@@ -6002,8 +6175,8 @@
         </p:nvSpPr>
         <p:spPr>
           <a:xfrm>
-            <a:off x="6309360" y="2926080"/>
-            <a:ext cx="5212080" cy="914400"/>
+            <a:off x="4544568" y="5087493"/>
+            <a:ext cx="3429000" cy="457200"/>
           </a:xfrm>
           <a:prstGeom prst="rect">
             <a:avLst/>
@@ -6018,34 +6191,63 @@
           <a:p>
             <a:pPr algn="l">
               <a:lnSpc>
-                <a:spcPct val="125000"/>
+                <a:spcPct val="120000"/>
               </a:lnSpc>
               <a:spcAft>
                 <a:spcPts val="600"/>
               </a:spcAft>
             </a:pPr>
             <a:r>
-              <a:rPr sz="1400" b="0">
-                <a:solidFill>
-                  <a:srgbClr val="F2F5FB"/>
+              <a:rPr sz="1200" b="0">
+                <a:solidFill>
+                  <a:srgbClr val="98A1B6"/>
                 </a:solidFill>
                 <a:latin typeface="Helvetica Neue"/>
               </a:rPr>
-              <a:t>·  Digits are large, because a digit is not reading — ₹65,000 is legible to someone who cannot read a sentence.</a:t>
-            </a:r>
-          </a:p>
-        </p:txBody>
-      </p:sp>
-      <p:sp>
-        <p:nvSpPr>
-          <p:cNvPr id="8" name="TextBox 7"/>
+              <a:t>/c/{id} — the borrower</a:t>
+            </a:r>
+          </a:p>
+        </p:txBody>
+      </p:sp>
+      <p:pic>
+        <p:nvPicPr>
+          <p:cNvPr id="8" name="Picture 7" descr="after_bargein.png"/>
+          <p:cNvPicPr>
+            <a:picLocks noChangeAspect="1"/>
+          </p:cNvPicPr>
+          <p:nvPr/>
+        </p:nvPicPr>
+        <p:blipFill>
+          <a:blip r:embed="rId4"/>
+          <a:stretch>
+            <a:fillRect/>
+          </a:stretch>
+        </p:blipFill>
+        <p:spPr>
+          <a:xfrm>
+            <a:off x="8266176" y="2834640"/>
+            <a:ext cx="3429000" cy="2143125"/>
+          </a:xfrm>
+          <a:prstGeom prst="rect">
+            <a:avLst/>
+          </a:prstGeom>
+          <a:ln w="12700">
+            <a:solidFill>
+              <a:srgbClr val="242A38"/>
+            </a:solidFill>
+          </a:ln>
+        </p:spPr>
+      </p:pic>
+      <p:sp>
+        <p:nvSpPr>
+          <p:cNvPr id="9" name="TextBox 8"/>
           <p:cNvSpPr txBox="1"/>
           <p:nvPr/>
         </p:nvSpPr>
         <p:spPr>
           <a:xfrm>
-            <a:off x="6309360" y="3840480"/>
-            <a:ext cx="5212080" cy="914400"/>
+            <a:off x="8266176" y="5087493"/>
+            <a:ext cx="3429000" cy="457200"/>
           </a:xfrm>
           <a:prstGeom prst="rect">
             <a:avLst/>
@@ -6060,62 +6262,20 @@
           <a:p>
             <a:pPr algn="l">
               <a:lnSpc>
-                <a:spcPct val="125000"/>
+                <a:spcPct val="120000"/>
               </a:lnSpc>
               <a:spcAft>
                 <a:spcPts val="600"/>
               </a:spcAft>
             </a:pPr>
             <a:r>
-              <a:rPr sz="1400" b="0">
-                <a:solidFill>
-                  <a:srgbClr val="F2F5FB"/>
+              <a:rPr sz="1200" b="0">
+                <a:solidFill>
+                  <a:srgbClr val="98A1B6"/>
                 </a:solidFill>
                 <a:latin typeface="Helvetica Neue"/>
               </a:rPr>
-              <a:t>·  Every instruction is spoken in Hindi, by the same Rime voice that is about to read her loan.</a:t>
-            </a:r>
-          </a:p>
-        </p:txBody>
-      </p:sp>
-      <p:sp>
-        <p:nvSpPr>
-          <p:cNvPr id="9" name="TextBox 8"/>
-          <p:cNvSpPr txBox="1"/>
-          <p:nvPr/>
-        </p:nvSpPr>
-        <p:spPr>
-          <a:xfrm>
-            <a:off x="6309360" y="4754880"/>
-            <a:ext cx="5212080" cy="914400"/>
-          </a:xfrm>
-          <a:prstGeom prst="rect">
-            <a:avLst/>
-          </a:prstGeom>
-          <a:noFill/>
-        </p:spPr>
-        <p:txBody>
-          <a:bodyPr wrap="square" lIns="0" rIns="0" tIns="0" bIns="0">
-            <a:spAutoFit/>
-          </a:bodyPr>
-          <a:lstStyle/>
-          <a:p>
-            <a:pPr algn="l">
-              <a:lnSpc>
-                <a:spcPct val="125000"/>
-              </a:lnSpc>
-              <a:spcAft>
-                <a:spcPts val="600"/>
-              </a:spcAft>
-            </a:pPr>
-            <a:r>
-              <a:rPr sz="1400" b="0">
-                <a:solidFill>
-                  <a:srgbClr val="F2F5FB"/>
-                </a:solidFill>
-                <a:latin typeface="Helvetica Neue"/>
-              </a:rPr>
-              <a:t>·  Refusal is amber, never red: if refusal looks like rejection, she learns the honest path is the punished one.</a:t>
+              <a:t>/panel — the evidence panel</a:t>
             </a:r>
           </a:p>
         </p:txBody>
@@ -6225,7 +6385,7 @@
                 </a:solidFill>
                 <a:latin typeface="Helvetica Neue"/>
               </a:rPr>
-              <a:t>“Heard” means the segment carrying the number finished.</a:t>
+              <a:t>“Heard” is arithmetic, not a claim.</a:t>
             </a:r>
           </a:p>
         </p:txBody>
@@ -6282,8 +6442,8 @@
         </p:nvSpPr>
         <p:spPr>
           <a:xfrm>
-            <a:off x="731520" y="1965960"/>
-            <a:ext cx="5852160" cy="914400"/>
+            <a:off x="731520" y="2057400"/>
+            <a:ext cx="5852160" cy="731520"/>
           </a:xfrm>
           <a:prstGeom prst="rect">
             <a:avLst/>
@@ -6298,39 +6458,20 @@
           <a:p>
             <a:pPr algn="l">
               <a:lnSpc>
-                <a:spcPct val="140000"/>
+                <a:spcPct val="125000"/>
               </a:lnSpc>
               <a:spcAft>
                 <a:spcPts val="600"/>
               </a:spcAft>
             </a:pPr>
             <a:r>
-              <a:rPr sz="1700" b="0">
+              <a:rPr sz="3600" b="1">
                 <a:solidFill>
                   <a:srgbClr val="1DB954"/>
                 </a:solidFill>
                 <a:latin typeface="Menlo"/>
               </a:rPr>
-              <a:t>μ-law at 8 kHz is 1 byte per sample.</a:t>
-            </a:r>
-          </a:p>
-          <a:p>
-            <a:pPr algn="l">
-              <a:lnSpc>
-                <a:spcPct val="140000"/>
-              </a:lnSpc>
-              <a:spcAft>
-                <a:spcPts val="600"/>
-              </a:spcAft>
-            </a:pPr>
-            <a:r>
-              <a:rPr sz="1700" b="0">
-                <a:solidFill>
-                  <a:srgbClr val="1DB954"/>
-                </a:solidFill>
-                <a:latin typeface="Menlo"/>
-              </a:rPr>
-              <a:t>8000 bytes = 1.000 s, exactly — not an estimate.</a:t>
+              <a:t>8000 bytes = 1.000 s</a:t>
             </a:r>
           </a:p>
         </p:txBody>
@@ -6343,8 +6484,8 @@
         </p:nvSpPr>
         <p:spPr>
           <a:xfrm>
-            <a:off x="731520" y="3063240"/>
-            <a:ext cx="5852160" cy="2377440"/>
+            <a:off x="777240" y="2834640"/>
+            <a:ext cx="5852160" cy="457200"/>
           </a:xfrm>
           <a:prstGeom prst="rect">
             <a:avLst/>
@@ -6359,6 +6500,48 @@
           <a:p>
             <a:pPr algn="l">
               <a:lnSpc>
+                <a:spcPct val="120000"/>
+              </a:lnSpc>
+              <a:spcAft>
+                <a:spcPts val="600"/>
+              </a:spcAft>
+            </a:pPr>
+            <a:r>
+              <a:rPr sz="1500" b="0">
+                <a:solidFill>
+                  <a:srgbClr val="98A1B6"/>
+                </a:solidFill>
+                <a:latin typeface="Helvetica Neue"/>
+              </a:rPr>
+              <a:t>μ-law at 8 kHz is one byte per sample. Exactly.</a:t>
+            </a:r>
+          </a:p>
+        </p:txBody>
+      </p:sp>
+      <p:sp>
+        <p:nvSpPr>
+          <p:cNvPr id="7" name="TextBox 6"/>
+          <p:cNvSpPr txBox="1"/>
+          <p:nvPr/>
+        </p:nvSpPr>
+        <p:spPr>
+          <a:xfrm>
+            <a:off x="731520" y="3520440"/>
+            <a:ext cx="5852160" cy="658368"/>
+          </a:xfrm>
+          <a:prstGeom prst="rect">
+            <a:avLst/>
+          </a:prstGeom>
+          <a:noFill/>
+        </p:spPr>
+        <p:txBody>
+          <a:bodyPr wrap="square" lIns="0" rIns="0" tIns="0" bIns="0">
+            <a:spAutoFit/>
+          </a:bodyPr>
+          <a:lstStyle/>
+          <a:p>
+            <a:pPr algn="l">
+              <a:lnSpc>
                 <a:spcPct val="125000"/>
               </a:lnSpc>
               <a:spcAft>
@@ -6372,9 +6555,32 @@
                 </a:solidFill>
                 <a:latin typeface="Helvetica Neue"/>
               </a:rPr>
-              <a:t>One comprehension-critical value per flush segment. So “did she hear the APR?” reduces to “did segment k finish playing?” — arithmetic over Rime's own byte counts.</a:t>
-            </a:r>
-          </a:p>
+              <a:t>·  One key value per flush segment.</a:t>
+            </a:r>
+          </a:p>
+        </p:txBody>
+      </p:sp>
+      <p:sp>
+        <p:nvSpPr>
+          <p:cNvPr id="8" name="TextBox 7"/>
+          <p:cNvSpPr txBox="1"/>
+          <p:nvPr/>
+        </p:nvSpPr>
+        <p:spPr>
+          <a:xfrm>
+            <a:off x="731520" y="4178808"/>
+            <a:ext cx="5852160" cy="658368"/>
+          </a:xfrm>
+          <a:prstGeom prst="rect">
+            <a:avLst/>
+          </a:prstGeom>
+          <a:noFill/>
+        </p:spPr>
+        <p:txBody>
+          <a:bodyPr wrap="square" lIns="0" rIns="0" tIns="0" bIns="0">
+            <a:spAutoFit/>
+          </a:bodyPr>
+          <a:lstStyle/>
           <a:p>
             <a:pPr algn="l">
               <a:lnSpc>
@@ -6391,9 +6597,32 @@
                 </a:solidFill>
                 <a:latin typeface="Helvetica Neue"/>
               </a:rPr>
-              <a:t/>
-            </a:r>
-          </a:p>
+              <a:t>·  “Did she hear the APR?” → “did segment k finish?”</a:t>
+            </a:r>
+          </a:p>
+        </p:txBody>
+      </p:sp>
+      <p:sp>
+        <p:nvSpPr>
+          <p:cNvPr id="9" name="TextBox 8"/>
+          <p:cNvSpPr txBox="1"/>
+          <p:nvPr/>
+        </p:nvSpPr>
+        <p:spPr>
+          <a:xfrm>
+            <a:off x="731520" y="4837176"/>
+            <a:ext cx="5852160" cy="658368"/>
+          </a:xfrm>
+          <a:prstGeom prst="rect">
+            <a:avLst/>
+          </a:prstGeom>
+          <a:noFill/>
+        </p:spPr>
+        <p:txBody>
+          <a:bodyPr wrap="square" lIns="0" rIns="0" tIns="0" bIns="0">
+            <a:spAutoFit/>
+          </a:bodyPr>
+          <a:lstStyle/>
           <a:p>
             <a:pPr algn="l">
               <a:lnSpc>
@@ -6410,14 +6639,56 @@
                 </a:solidFill>
                 <a:latin typeface="Helvetica Neue"/>
               </a:rPr>
-              <a:t>It needs no vendor word timestamps, which Rime does not emit for Hindi anyway. It works in any language.</a:t>
+              <a:t>·  Needs no vendor timestamps. Works in any language.</a:t>
+            </a:r>
+          </a:p>
+        </p:txBody>
+      </p:sp>
+      <p:sp>
+        <p:nvSpPr>
+          <p:cNvPr id="10" name="TextBox 9"/>
+          <p:cNvSpPr txBox="1"/>
+          <p:nvPr/>
+        </p:nvSpPr>
+        <p:spPr>
+          <a:xfrm>
+            <a:off x="731520" y="5495544"/>
+            <a:ext cx="5852160" cy="658368"/>
+          </a:xfrm>
+          <a:prstGeom prst="rect">
+            <a:avLst/>
+          </a:prstGeom>
+          <a:noFill/>
+        </p:spPr>
+        <p:txBody>
+          <a:bodyPr wrap="square" lIns="0" rIns="0" tIns="0" bIns="0">
+            <a:spAutoFit/>
+          </a:bodyPr>
+          <a:lstStyle/>
+          <a:p>
+            <a:pPr algn="l">
+              <a:lnSpc>
+                <a:spcPct val="125000"/>
+              </a:lnSpc>
+              <a:spcAft>
+                <a:spcPts val="600"/>
+              </a:spcAft>
+            </a:pPr>
+            <a:r>
+              <a:rPr sz="1500" b="0">
+                <a:solidFill>
+                  <a:srgbClr val="FFB020"/>
+                </a:solidFill>
+                <a:latin typeface="Helvetica Neue"/>
+              </a:rPr>
+              <a:t>·  Barge-in mid-number → the clause is re-read from the start, never resumed.</a:t>
             </a:r>
           </a:p>
         </p:txBody>
       </p:sp>
       <p:pic>
         <p:nvPicPr>
-          <p:cNvPr id="7" name="Picture 6" descr="after_bargein.png"/>
+          <p:cNvPr id="11" name="Picture 10" descr="after_bargein.png"/>
           <p:cNvPicPr>
             <a:picLocks noChangeAspect="1"/>
           </p:cNvPicPr>
@@ -6431,7 +6702,7 @@
         </p:blipFill>
         <p:spPr>
           <a:xfrm>
-            <a:off x="6949440" y="1920240"/>
+            <a:off x="6949440" y="2057400"/>
             <a:ext cx="4572000" cy="2857500"/>
           </a:xfrm>
           <a:prstGeom prst="rect">
@@ -6446,13 +6717,13 @@
       </p:pic>
       <p:sp>
         <p:nvSpPr>
-          <p:cNvPr id="8" name="TextBox 7"/>
+          <p:cNvPr id="12" name="TextBox 11"/>
           <p:cNvSpPr txBox="1"/>
           <p:nvPr/>
         </p:nvSpPr>
         <p:spPr>
           <a:xfrm>
-            <a:off x="6949440" y="4892040"/>
+            <a:off x="6949440" y="5029200"/>
             <a:ext cx="4572000" cy="457200"/>
           </a:xfrm>
           <a:prstGeom prst="rect">
@@ -6481,7 +6752,7 @@
                 </a:solidFill>
                 <a:latin typeface="Helvetica Neue"/>
               </a:rPr>
-              <a:t>Barge-in mid-number: the clause goes PARTIALLY_HEARD and is re-read from the start — never resumed.</a:t>
+              <a:t>PARTIALLY_HEARD. The value is struck through, and consent is blocked on this clause.</a:t>
             </a:r>
           </a:p>
         </p:txBody>
@@ -6549,7 +6820,7 @@
                 </a:solidFill>
                 <a:latin typeface="Helvetica Neue"/>
               </a:rPr>
-              <a:t>THE ARTIFACT</a:t>
+              <a:t>THE MEASURED RESULT</a:t>
             </a:r>
           </a:p>
         </p:txBody>
@@ -6591,7 +6862,7 @@
                 </a:solidFill>
                 <a:latin typeface="Helvetica Neue"/>
               </a:rPr>
-              <a:t>A refusal is a row, not an error.</a:t>
+              <a:t>Value Error Rate on account identifiers</a:t>
             </a:r>
           </a:p>
         </p:txBody>
@@ -6640,45 +6911,16 @@
           </a:p>
         </p:txBody>
       </p:sp>
-      <p:pic>
-        <p:nvPicPr>
-          <p:cNvPr id="5" name="Picture 4" descr="record.png"/>
-          <p:cNvPicPr>
-            <a:picLocks noChangeAspect="1"/>
-          </p:cNvPicPr>
-          <p:nvPr/>
-        </p:nvPicPr>
-        <p:blipFill>
-          <a:blip r:embed="rId2"/>
-          <a:stretch>
-            <a:fillRect/>
-          </a:stretch>
-        </p:blipFill>
-        <p:spPr>
-          <a:xfrm>
-            <a:off x="731520" y="1874519"/>
-            <a:ext cx="6949440" cy="3257550"/>
-          </a:xfrm>
-          <a:prstGeom prst="rect">
-            <a:avLst/>
-          </a:prstGeom>
-          <a:ln w="12700">
-            <a:solidFill>
-              <a:srgbClr val="242A38"/>
-            </a:solidFill>
-          </a:ln>
-        </p:spPr>
-      </p:pic>
-      <p:sp>
-        <p:nvSpPr>
-          <p:cNvPr id="6" name="TextBox 5"/>
+      <p:sp>
+        <p:nvSpPr>
+          <p:cNvPr id="5" name="TextBox 4"/>
           <p:cNvSpPr txBox="1"/>
           <p:nvPr/>
         </p:nvSpPr>
         <p:spPr>
           <a:xfrm>
-            <a:off x="7863840" y="2011680"/>
-            <a:ext cx="3749039" cy="960120"/>
+            <a:off x="914400" y="2148840"/>
+            <a:ext cx="4572000" cy="1097280"/>
           </a:xfrm>
           <a:prstGeom prst="rect">
             <a:avLst/>
@@ -6700,27 +6942,27 @@
               </a:spcAft>
             </a:pPr>
             <a:r>
-              <a:rPr sz="1300" b="0">
-                <a:solidFill>
-                  <a:srgbClr val="FFB020"/>
+              <a:rPr sz="6200" b="1">
+                <a:solidFill>
+                  <a:srgbClr val="1DB954"/>
                 </a:solidFill>
                 <a:latin typeface="Helvetica Neue"/>
               </a:rPr>
-              <a:t>·  96.6% of the clause played — and the account number still counts as NOT heard</a:t>
-            </a:r>
-          </a:p>
-        </p:txBody>
-      </p:sp>
-      <p:sp>
-        <p:nvSpPr>
-          <p:cNvPr id="7" name="TextBox 6"/>
+              <a:t>100% → 0%</a:t>
+            </a:r>
+          </a:p>
+        </p:txBody>
+      </p:sp>
+      <p:sp>
+        <p:nvSpPr>
+          <p:cNvPr id="6" name="TextBox 5"/>
           <p:cNvSpPr txBox="1"/>
           <p:nvPr/>
         </p:nvSpPr>
         <p:spPr>
           <a:xfrm>
-            <a:off x="7863840" y="2971800"/>
-            <a:ext cx="3749039" cy="960120"/>
+            <a:off x="960120" y="3291840"/>
+            <a:ext cx="4572000" cy="457200"/>
           </a:xfrm>
           <a:prstGeom prst="rect">
             <a:avLst/>
@@ -6735,34 +6977,34 @@
           <a:p>
             <a:pPr algn="l">
               <a:lnSpc>
-                <a:spcPct val="125000"/>
+                <a:spcPct val="120000"/>
               </a:lnSpc>
               <a:spcAft>
                 <a:spcPts val="600"/>
               </a:spcAft>
             </a:pPr>
             <a:r>
-              <a:rPr sz="1300" b="0">
-                <a:solidFill>
-                  <a:srgbClr val="F2F5FB"/>
+              <a:rPr sz="1500" b="0">
+                <a:solidFill>
+                  <a:srgbClr val="98A1B6"/>
                 </a:solidFill>
                 <a:latin typeface="Helvetica Neue"/>
               </a:rPr>
-              <a:t>·  Its segment did not finish, so it was never communicated.</a:t>
-            </a:r>
-          </a:p>
-        </p:txBody>
-      </p:sp>
-      <p:sp>
-        <p:nvSpPr>
-          <p:cNvPr id="8" name="TextBox 7"/>
+              <a:t>Deepgram nova-3</a:t>
+            </a:r>
+          </a:p>
+        </p:txBody>
+      </p:sp>
+      <p:sp>
+        <p:nvSpPr>
+          <p:cNvPr id="7" name="TextBox 6"/>
           <p:cNvSpPr txBox="1"/>
           <p:nvPr/>
         </p:nvSpPr>
         <p:spPr>
           <a:xfrm>
-            <a:off x="7863840" y="3931920"/>
-            <a:ext cx="3749039" cy="960120"/>
+            <a:off x="6400800" y="2148840"/>
+            <a:ext cx="4572000" cy="1097280"/>
           </a:xfrm>
           <a:prstGeom prst="rect">
             <a:avLst/>
@@ -6784,27 +7026,27 @@
               </a:spcAft>
             </a:pPr>
             <a:r>
-              <a:rPr sz="1300" b="0">
-                <a:solidFill>
-                  <a:srgbClr val="FF5C5C"/>
+              <a:rPr sz="6200" b="1">
+                <a:solidFill>
+                  <a:srgbClr val="1DB954"/>
                 </a:solidFill>
                 <a:latin typeface="Helvetica Neue"/>
               </a:rPr>
-              <a:t>·  Consent REFUSED · flagged for human callback</a:t>
-            </a:r>
-          </a:p>
-        </p:txBody>
-      </p:sp>
-      <p:sp>
-        <p:nvSpPr>
-          <p:cNvPr id="9" name="TextBox 8"/>
+              <a:t>75% → 0%</a:t>
+            </a:r>
+          </a:p>
+        </p:txBody>
+      </p:sp>
+      <p:sp>
+        <p:nvSpPr>
+          <p:cNvPr id="8" name="TextBox 7"/>
           <p:cNvSpPr txBox="1"/>
           <p:nvPr/>
         </p:nvSpPr>
         <p:spPr>
           <a:xfrm>
-            <a:off x="7863840" y="4892040"/>
-            <a:ext cx="3749039" cy="960120"/>
+            <a:off x="6446520" y="3291840"/>
+            <a:ext cx="4572000" cy="457200"/>
           </a:xfrm>
           <a:prstGeom prst="rect">
             <a:avLst/>
@@ -6819,6 +7061,134 @@
           <a:p>
             <a:pPr algn="l">
               <a:lnSpc>
+                <a:spcPct val="120000"/>
+              </a:lnSpc>
+              <a:spcAft>
+                <a:spcPts val="600"/>
+              </a:spcAft>
+            </a:pPr>
+            <a:r>
+              <a:rPr sz="1500" b="0">
+                <a:solidFill>
+                  <a:srgbClr val="98A1B6"/>
+                </a:solidFill>
+                <a:latin typeface="Helvetica Neue"/>
+              </a:rPr>
+              <a:t>Sarvam saaras</a:t>
+            </a:r>
+          </a:p>
+        </p:txBody>
+      </p:sp>
+      <p:sp>
+        <p:nvSpPr>
+          <p:cNvPr id="9" name="TextBox 8"/>
+          <p:cNvSpPr txBox="1"/>
+          <p:nvPr/>
+        </p:nvSpPr>
+        <p:spPr>
+          <a:xfrm>
+            <a:off x="914400" y="3886200"/>
+            <a:ext cx="10058400" cy="457200"/>
+          </a:xfrm>
+          <a:prstGeom prst="rect">
+            <a:avLst/>
+          </a:prstGeom>
+          <a:noFill/>
+        </p:spPr>
+        <p:txBody>
+          <a:bodyPr wrap="square" lIns="0" rIns="0" tIns="0" bIns="0">
+            <a:spAutoFit/>
+          </a:bodyPr>
+          <a:lstStyle/>
+          <a:p>
+            <a:pPr algn="l">
+              <a:lnSpc>
+                <a:spcPct val="120000"/>
+              </a:lnSpc>
+              <a:spcAft>
+                <a:spcPts val="600"/>
+              </a:spcAft>
+            </a:pPr>
+            <a:r>
+              <a:rPr sz="1400" b="0">
+                <a:solidFill>
+                  <a:srgbClr val="98A1B6"/>
+                </a:solidFill>
+                <a:latin typeface="Helvetica Neue"/>
+              </a:rPr>
+              <a:t>8 kHz μ-law · model, speaker, lang, sampling rate and timeScaleFactor held constant · both arms are Rime</a:t>
+            </a:r>
+          </a:p>
+        </p:txBody>
+      </p:sp>
+      <p:sp>
+        <p:nvSpPr>
+          <p:cNvPr id="10" name="Rectangle 9"/>
+          <p:cNvSpPr/>
+          <p:nvPr/>
+        </p:nvSpPr>
+        <p:spPr>
+          <a:xfrm>
+            <a:off x="914400" y="4526280"/>
+            <a:ext cx="10058400" cy="19050"/>
+          </a:xfrm>
+          <a:prstGeom prst="rect">
+            <a:avLst/>
+          </a:prstGeom>
+          <a:solidFill>
+            <a:srgbClr val="FFB020"/>
+          </a:solidFill>
+          <a:ln>
+            <a:noFill/>
+          </a:ln>
+          <a:effectLst/>
+        </p:spPr>
+        <p:style>
+          <a:lnRef idx="1">
+            <a:schemeClr val="accent1"/>
+          </a:lnRef>
+          <a:fillRef idx="3">
+            <a:schemeClr val="accent1"/>
+          </a:fillRef>
+          <a:effectRef idx="2">
+            <a:schemeClr val="accent1"/>
+          </a:effectRef>
+          <a:fontRef idx="minor">
+            <a:schemeClr val="lt1"/>
+          </a:fontRef>
+        </p:style>
+        <p:txBody>
+          <a:bodyPr rtlCol="0" anchor="ctr"/>
+          <a:lstStyle/>
+          <a:p>
+            <a:pPr algn="ctr"/>
+          </a:p>
+        </p:txBody>
+      </p:sp>
+      <p:sp>
+        <p:nvSpPr>
+          <p:cNvPr id="11" name="TextBox 10"/>
+          <p:cNvSpPr txBox="1"/>
+          <p:nvPr/>
+        </p:nvSpPr>
+        <p:spPr>
+          <a:xfrm>
+            <a:off x="914400" y="4754880"/>
+            <a:ext cx="10058400" cy="365760"/>
+          </a:xfrm>
+          <a:prstGeom prst="rect">
+            <a:avLst/>
+          </a:prstGeom>
+          <a:noFill/>
+        </p:spPr>
+        <p:txBody>
+          <a:bodyPr wrap="square" lIns="0" rIns="0" tIns="0" bIns="0">
+            <a:spAutoFit/>
+          </a:bodyPr>
+          <a:lstStyle/>
+          <a:p>
+            <a:pPr algn="l">
+              <a:lnSpc>
                 <a:spcPct val="125000"/>
               </a:lnSpc>
               <a:spcAft>
@@ -6826,13 +7196,139 @@
               </a:spcAft>
             </a:pPr>
             <a:r>
-              <a:rPr sz="1300" b="0">
-                <a:solidFill>
-                  <a:srgbClr val="F2F5FB"/>
+              <a:rPr sz="1800" b="1">
+                <a:solidFill>
+                  <a:srgbClr val="FFB020"/>
                 </a:solidFill>
                 <a:latin typeface="Helvetica Neue"/>
               </a:rPr>
-              <a:t>·  sha256 over a canonical serialisation; provenance of the source document is inside the hash.</a:t>
+              <a:t>Read that with its n.</a:t>
+            </a:r>
+          </a:p>
+        </p:txBody>
+      </p:sp>
+      <p:sp>
+        <p:nvSpPr>
+          <p:cNvPr id="12" name="TextBox 11"/>
+          <p:cNvSpPr txBox="1"/>
+          <p:nvPr/>
+        </p:nvSpPr>
+        <p:spPr>
+          <a:xfrm>
+            <a:off x="914400" y="5257800"/>
+            <a:ext cx="10058400" cy="411480"/>
+          </a:xfrm>
+          <a:prstGeom prst="rect">
+            <a:avLst/>
+          </a:prstGeom>
+          <a:noFill/>
+        </p:spPr>
+        <p:txBody>
+          <a:bodyPr wrap="square" lIns="0" rIns="0" tIns="0" bIns="0">
+            <a:spAutoFit/>
+          </a:bodyPr>
+          <a:lstStyle/>
+          <a:p>
+            <a:pPr algn="l">
+              <a:lnSpc>
+                <a:spcPct val="125000"/>
+              </a:lnSpc>
+              <a:spcAft>
+                <a:spcPts val="600"/>
+              </a:spcAft>
+            </a:pPr>
+            <a:r>
+              <a:rPr sz="1400" b="0">
+                <a:solidFill>
+                  <a:srgbClr val="98A1B6"/>
+                </a:solidFill>
+                <a:latin typeface="Helvetica Neue"/>
+              </a:rPr>
+              <a:t>·  n = 24 utterances, 4 per category — not the 120 pre-registered.</a:t>
+            </a:r>
+          </a:p>
+        </p:txBody>
+      </p:sp>
+      <p:sp>
+        <p:nvSpPr>
+          <p:cNvPr id="13" name="TextBox 12"/>
+          <p:cNvSpPr txBox="1"/>
+          <p:nvPr/>
+        </p:nvSpPr>
+        <p:spPr>
+          <a:xfrm>
+            <a:off x="914400" y="5669280"/>
+            <a:ext cx="10058400" cy="411480"/>
+          </a:xfrm>
+          <a:prstGeom prst="rect">
+            <a:avLst/>
+          </a:prstGeom>
+          <a:noFill/>
+        </p:spPr>
+        <p:txBody>
+          <a:bodyPr wrap="square" lIns="0" rIns="0" tIns="0" bIns="0">
+            <a:spAutoFit/>
+          </a:bodyPr>
+          <a:lstStyle/>
+          <a:p>
+            <a:pPr algn="l">
+              <a:lnSpc>
+                <a:spcPct val="125000"/>
+              </a:lnSpc>
+              <a:spcAft>
+                <a:spcPts val="600"/>
+              </a:spcAft>
+            </a:pPr>
+            <a:r>
+              <a:rPr sz="1400" b="0">
+                <a:solidFill>
+                  <a:srgbClr val="98A1B6"/>
+                </a:solidFill>
+                <a:latin typeface="Helvetica Neue"/>
+              </a:rPr>
+              <a:t>·  Four of six categories show NO effect. We report them.</a:t>
+            </a:r>
+          </a:p>
+        </p:txBody>
+      </p:sp>
+      <p:sp>
+        <p:nvSpPr>
+          <p:cNvPr id="14" name="TextBox 13"/>
+          <p:cNvSpPr txBox="1"/>
+          <p:nvPr/>
+        </p:nvSpPr>
+        <p:spPr>
+          <a:xfrm>
+            <a:off x="914400" y="6080760"/>
+            <a:ext cx="10058400" cy="411480"/>
+          </a:xfrm>
+          <a:prstGeom prst="rect">
+            <a:avLst/>
+          </a:prstGeom>
+          <a:noFill/>
+        </p:spPr>
+        <p:txBody>
+          <a:bodyPr wrap="square" lIns="0" rIns="0" tIns="0" bIns="0">
+            <a:spAutoFit/>
+          </a:bodyPr>
+          <a:lstStyle/>
+          <a:p>
+            <a:pPr algn="l">
+              <a:lnSpc>
+                <a:spcPct val="125000"/>
+              </a:lnSpc>
+              <a:spcAft>
+                <a:spcPts val="600"/>
+              </a:spcAft>
+            </a:pPr>
+            <a:r>
+              <a:rPr sz="1400" b="0">
+                <a:solidFill>
+                  <a:srgbClr val="98A1B6"/>
+                </a:solidFill>
+                <a:latin typeface="Helvetica Neue"/>
+              </a:rPr>
+              <a:t>·  Claim written and committed before any product code existed.</a:t>
             </a:r>
           </a:p>
         </p:txBody>
@@ -6900,7 +7396,7 @@
                 </a:solidFill>
                 <a:latin typeface="Helvetica Neue"/>
               </a:rPr>
-              <a:t>THE MEASURED RESULT</a:t>
+              <a:t>RIME</a:t>
             </a:r>
           </a:p>
         </p:txBody>
@@ -6942,7 +7438,7 @@
                 </a:solidFill>
                 <a:latin typeface="Helvetica Neue"/>
               </a:rPr>
-              <a:t>Value Error Rate on account identifiers</a:t>
+              <a:t>Four things we measured rather than assumed.</a:t>
             </a:r>
           </a:p>
         </p:txBody>
@@ -6999,8 +7495,8 @@
         </p:nvSpPr>
         <p:spPr>
           <a:xfrm>
-            <a:off x="914400" y="2194560"/>
-            <a:ext cx="4572000" cy="1097280"/>
+            <a:off x="731520" y="2194560"/>
+            <a:ext cx="10881360" cy="960120"/>
           </a:xfrm>
           <a:prstGeom prst="rect">
             <a:avLst/>
@@ -7022,13 +7518,13 @@
               </a:spcAft>
             </a:pPr>
             <a:r>
-              <a:rPr sz="5800" b="1">
-                <a:solidFill>
-                  <a:srgbClr val="1DB954"/>
+              <a:rPr sz="1900" b="0">
+                <a:solidFill>
+                  <a:srgbClr val="F2F5FB"/>
                 </a:solidFill>
                 <a:latin typeface="Helvetica Neue"/>
               </a:rPr>
-              <a:t>100% → 0%</a:t>
+              <a:t>·  No Hindi word timestamps — and it fails silently, not loudly.</a:t>
             </a:r>
           </a:p>
         </p:txBody>
@@ -7041,8 +7537,8 @@
         </p:nvSpPr>
         <p:spPr>
           <a:xfrm>
-            <a:off x="960120" y="3291840"/>
-            <a:ext cx="4572000" cy="365760"/>
+            <a:off x="731520" y="3154680"/>
+            <a:ext cx="10881360" cy="960120"/>
           </a:xfrm>
           <a:prstGeom prst="rect">
             <a:avLst/>
@@ -7064,13 +7560,13 @@
               </a:spcAft>
             </a:pPr>
             <a:r>
-              <a:rPr sz="1500" b="0">
-                <a:solidFill>
-                  <a:srgbClr val="98A1B6"/>
+              <a:rPr sz="1900" b="0">
+                <a:solidFill>
+                  <a:srgbClr val="F2F5FB"/>
                 </a:solidFill>
                 <a:latin typeface="Helvetica Neue"/>
               </a:rPr>
-              <a:t>Deepgram nova-3</a:t>
+              <a:t>·  No cancel primitive. Barge-in closes the socket; a warm spare hides the reconnect.</a:t>
             </a:r>
           </a:p>
         </p:txBody>
@@ -7083,8 +7579,8 @@
         </p:nvSpPr>
         <p:spPr>
           <a:xfrm>
-            <a:off x="6400800" y="2194560"/>
-            <a:ext cx="4572000" cy="1097280"/>
+            <a:off x="731520" y="4114800"/>
+            <a:ext cx="10881360" cy="960120"/>
           </a:xfrm>
           <a:prstGeom prst="rect">
             <a:avLst/>
@@ -7106,13 +7602,13 @@
               </a:spcAft>
             </a:pPr>
             <a:r>
-              <a:rPr sz="5800" b="1">
-                <a:solidFill>
-                  <a:srgbClr val="1DB954"/>
+              <a:rPr sz="1900" b="0">
+                <a:solidFill>
+                  <a:srgbClr val="F2F5FB"/>
                 </a:solidFill>
                 <a:latin typeface="Helvetica Neue"/>
               </a:rPr>
-              <a:t>75% → 0%</a:t>
+              <a:t>·  The LiveKit plugin hardcodes pcm, so 8 kHz μ-law is unreachable through it.</a:t>
             </a:r>
           </a:p>
         </p:txBody>
@@ -7125,8 +7621,8 @@
         </p:nvSpPr>
         <p:spPr>
           <a:xfrm>
-            <a:off x="6446520" y="3291840"/>
-            <a:ext cx="4572000" cy="365760"/>
+            <a:off x="731520" y="5074920"/>
+            <a:ext cx="10881360" cy="960120"/>
           </a:xfrm>
           <a:prstGeom prst="rect">
             <a:avLst/>
@@ -7148,75 +7644,33 @@
               </a:spcAft>
             </a:pPr>
             <a:r>
-              <a:rPr sz="1500" b="0">
-                <a:solidFill>
-                  <a:srgbClr val="98A1B6"/>
+              <a:rPr sz="1900" b="0">
+                <a:solidFill>
+                  <a:srgbClr val="FFB020"/>
                 </a:solidFill>
                 <a:latin typeface="Helvetica Neue"/>
               </a:rPr>
-              <a:t>Sarvam saaras</a:t>
-            </a:r>
-          </a:p>
-        </p:txBody>
-      </p:sp>
-      <p:sp>
-        <p:nvSpPr>
-          <p:cNvPr id="9" name="TextBox 8"/>
-          <p:cNvSpPr txBox="1"/>
-          <p:nvPr/>
-        </p:nvSpPr>
-        <p:spPr>
-          <a:xfrm>
-            <a:off x="914400" y="3977639"/>
-            <a:ext cx="10058400" cy="457200"/>
-          </a:xfrm>
-          <a:prstGeom prst="rect">
-            <a:avLst/>
-          </a:prstGeom>
-          <a:noFill/>
-        </p:spPr>
-        <p:txBody>
-          <a:bodyPr wrap="square" lIns="0" rIns="0" tIns="0" bIns="0">
-            <a:spAutoFit/>
-          </a:bodyPr>
-          <a:lstStyle/>
-          <a:p>
-            <a:pPr algn="l">
-              <a:lnSpc>
-                <a:spcPct val="125000"/>
-              </a:lnSpc>
-              <a:spcAft>
-                <a:spcPts val="600"/>
-              </a:spcAft>
-            </a:pPr>
-            <a:r>
-              <a:rPr sz="1400" b="0">
-                <a:solidFill>
-                  <a:srgbClr val="98A1B6"/>
-                </a:solidFill>
-                <a:latin typeface="Helvetica Neue"/>
-              </a:rPr>
-              <a:t>8 kHz μ-law channel · modelId, speaker, lang, samplingRate and timeScaleFactor held constant · both arms are Rime</a:t>
-            </a:r>
-          </a:p>
-        </p:txBody>
-      </p:sp>
-      <p:sp>
-        <p:nvSpPr>
-          <p:cNvPr id="10" name="Rectangle 9"/>
+              <a:t>·  /ws3 has no per-flush event. Pipeline the flushes and every chunk is attributed to segment 0. This one bit us in production.</a:t>
+            </a:r>
+          </a:p>
+        </p:txBody>
+      </p:sp>
+      <p:sp>
+        <p:nvSpPr>
+          <p:cNvPr id="9" name="Rectangle 8"/>
           <p:cNvSpPr/>
           <p:nvPr/>
         </p:nvSpPr>
         <p:spPr>
           <a:xfrm>
-            <a:off x="914400" y="4572000"/>
-            <a:ext cx="10058400" cy="19050"/>
+            <a:off x="731520" y="5852160"/>
+            <a:ext cx="10881360" cy="19050"/>
           </a:xfrm>
           <a:prstGeom prst="rect">
             <a:avLst/>
           </a:prstGeom>
           <a:solidFill>
-            <a:srgbClr val="FFB020"/>
+            <a:srgbClr val="242A38"/>
           </a:solidFill>
           <a:ln>
             <a:noFill/>
@@ -7247,14 +7701,14 @@
       </p:sp>
       <p:sp>
         <p:nvSpPr>
-          <p:cNvPr id="11" name="TextBox 10"/>
+          <p:cNvPr id="10" name="TextBox 9"/>
           <p:cNvSpPr txBox="1"/>
           <p:nvPr/>
         </p:nvSpPr>
         <p:spPr>
           <a:xfrm>
-            <a:off x="914400" y="4754880"/>
-            <a:ext cx="10058400" cy="365760"/>
+            <a:off x="731520" y="6080760"/>
+            <a:ext cx="10881360" cy="457200"/>
           </a:xfrm>
           <a:prstGeom prst="rect">
             <a:avLst/>
@@ -7269,81 +7723,20 @@
           <a:p>
             <a:pPr algn="l">
               <a:lnSpc>
-                <a:spcPct val="125000"/>
+                <a:spcPct val="120000"/>
               </a:lnSpc>
               <a:spcAft>
                 <a:spcPts val="600"/>
               </a:spcAft>
             </a:pPr>
             <a:r>
-              <a:rPr sz="1600" b="1">
-                <a:solidFill>
-                  <a:srgbClr val="FFB020"/>
+              <a:rPr sz="1200" b="0">
+                <a:solidFill>
+                  <a:srgbClr val="98A1B6"/>
                 </a:solidFill>
                 <a:latin typeface="Helvetica Neue"/>
               </a:rPr>
-              <a:t>Read that with its n.</a:t>
-            </a:r>
-          </a:p>
-        </p:txBody>
-      </p:sp>
-      <p:sp>
-        <p:nvSpPr>
-          <p:cNvPr id="12" name="TextBox 11"/>
-          <p:cNvSpPr txBox="1"/>
-          <p:nvPr/>
-        </p:nvSpPr>
-        <p:spPr>
-          <a:xfrm>
-            <a:off x="914400" y="5120640"/>
-            <a:ext cx="10058400" cy="1280160"/>
-          </a:xfrm>
-          <a:prstGeom prst="rect">
-            <a:avLst/>
-          </a:prstGeom>
-          <a:noFill/>
-        </p:spPr>
-        <p:txBody>
-          <a:bodyPr wrap="square" lIns="0" rIns="0" tIns="0" bIns="0">
-            <a:spAutoFit/>
-          </a:bodyPr>
-          <a:lstStyle/>
-          <a:p>
-            <a:pPr algn="l">
-              <a:lnSpc>
-                <a:spcPct val="125000"/>
-              </a:lnSpc>
-              <a:spcAft>
-                <a:spcPts val="600"/>
-              </a:spcAft>
-            </a:pPr>
-            <a:r>
-              <a:rPr sz="1300" b="0">
-                <a:solidFill>
-                  <a:srgbClr val="98A1B6"/>
-                </a:solidFill>
-                <a:latin typeface="Helvetica Neue"/>
-              </a:rPr>
-              <a:t>The published run is 24 utterances — 4 per category — not the 120 / 20 pre-registered in evals/ACCEPTANCE.md. The direction and the mechanism are what the committed per-row evidence supports; the exact percentages rest on n=4 and should be expected to move on a full run.</a:t>
-            </a:r>
-          </a:p>
-          <a:p>
-            <a:pPr algn="l">
-              <a:lnSpc>
-                <a:spcPct val="125000"/>
-              </a:lnSpc>
-              <a:spcAft>
-                <a:spcPts val="600"/>
-              </a:spcAft>
-            </a:pPr>
-            <a:r>
-              <a:rPr sz="1300" b="0">
-                <a:solidFill>
-                  <a:srgbClr val="98A1B6"/>
-                </a:solidFill>
-                <a:latin typeface="Helvetica Neue"/>
-              </a:rPr>
-              <a:t>Four of six categories show NO effect, and are reported as the negative result they are.</a:t>
+              <a:t>coda / taru / hi · mulaw 8000 · segment=never + explicit flush · timeScaleFactor 1.0, speedAlpha never sent   —   RIME_EVIDENCE.md</a:t>
             </a:r>
           </a:p>
         </p:txBody>
@@ -7411,7 +7804,7 @@
                 </a:solidFill>
                 <a:latin typeface="Helvetica Neue"/>
               </a:rPr>
-              <a:t>RIME</a:t>
+              <a:t>WHAT WE DO NOT CLAIM</a:t>
             </a:r>
           </a:p>
         </p:txBody>
@@ -7449,11 +7842,11 @@
             <a:r>
               <a:rPr sz="3200" b="1">
                 <a:solidFill>
-                  <a:srgbClr val="F2F5FB"/>
+                  <a:srgbClr val="FFB020"/>
                 </a:solidFill>
                 <a:latin typeface="Helvetica Neue"/>
               </a:rPr>
-              <a:t>Four things we measured rather than assumed.</a:t>
+              <a:t>Stated before the results, not after.</a:t>
             </a:r>
           </a:p>
         </p:txBody>
@@ -7510,8 +7903,8 @@
         </p:nvSpPr>
         <p:spPr>
           <a:xfrm>
-            <a:off x="731520" y="1920240"/>
-            <a:ext cx="10881360" cy="1051560"/>
+            <a:off x="731520" y="2194560"/>
+            <a:ext cx="10881360" cy="713232"/>
           </a:xfrm>
           <a:prstGeom prst="rect">
             <a:avLst/>
@@ -7533,13 +7926,13 @@
               </a:spcAft>
             </a:pPr>
             <a:r>
-              <a:rPr sz="1350" b="0">
-                <a:solidFill>
-                  <a:srgbClr val="F2F5FB"/>
+              <a:rPr sz="1900" b="0">
+                <a:solidFill>
+                  <a:srgbClr val="98A1B6"/>
                 </a:solidFill>
                 <a:latin typeface="Helvetica Neue"/>
               </a:rPr>
-              <a:t>·  No word timestamps in Hindi, and it fails SILENTLY. With lang omitted they do appear — but are byte-identical across sample rates while duration is not. Unusable. So we use our own flush boundaries.</a:t>
+              <a:t>·  The telephone channel is SIMULATED. No live PSTN leg.</a:t>
             </a:r>
           </a:p>
         </p:txBody>
@@ -7552,8 +7945,8 @@
         </p:nvSpPr>
         <p:spPr>
           <a:xfrm>
-            <a:off x="731520" y="2971800"/>
-            <a:ext cx="10881360" cy="1051560"/>
+            <a:off x="731520" y="2907792"/>
+            <a:ext cx="10881360" cy="713232"/>
           </a:xfrm>
           <a:prstGeom prst="rect">
             <a:avLst/>
@@ -7575,13 +7968,13 @@
               </a:spcAft>
             </a:pPr>
             <a:r>
-              <a:rPr sz="1350" b="0">
-                <a:solidFill>
-                  <a:srgbClr val="F2F5FB"/>
+              <a:rPr sz="1900" b="0">
+                <a:solidFill>
+                  <a:srgbClr val="98A1B6"/>
                 </a:solidFill>
                 <a:latin typeface="Helvetica Neue"/>
               </a:rPr>
-              <a:t>·  No cancel primitive. `clear` does not cancel in-flight synthesis and contextId came back null on every frame. Barge-in closes the socket, with a warm spare.</a:t>
+              <a:t>·  “Heard” means played out of the speaker. We measure playout, not cognition.</a:t>
             </a:r>
           </a:p>
         </p:txBody>
@@ -7594,8 +7987,8 @@
         </p:nvSpPr>
         <p:spPr>
           <a:xfrm>
-            <a:off x="731520" y="4023360"/>
-            <a:ext cx="10881360" cy="1051560"/>
+            <a:off x="731520" y="3621024"/>
+            <a:ext cx="10881360" cy="713232"/>
           </a:xfrm>
           <a:prstGeom prst="rect">
             <a:avLst/>
@@ -7617,13 +8010,13 @@
               </a:spcAft>
             </a:pPr>
             <a:r>
-              <a:rPr sz="1350" b="0">
-                <a:solidFill>
-                  <a:srgbClr val="F2F5FB"/>
+              <a:rPr sz="1900" b="0">
+                <a:solidFill>
+                  <a:srgbClr val="98A1B6"/>
                 </a:solidFill>
                 <a:latin typeface="Helvetica Neue"/>
               </a:rPr>
-              <a:t>·  The Rime LiveKit plugin hardcodes audioFormat=pcm, so 8 kHz μ-law is unreachable through it. Clause audio goes through our own /ws3 client.</a:t>
+              <a:t>·  Hindi only — Coda is the only Rime model with Hindi at all.</a:t>
             </a:r>
           </a:p>
         </p:txBody>
@@ -7636,8 +8029,8 @@
         </p:nvSpPr>
         <p:spPr>
           <a:xfrm>
-            <a:off x="731520" y="5074919"/>
-            <a:ext cx="10881360" cy="1051560"/>
+            <a:off x="731520" y="4334256"/>
+            <a:ext cx="10881360" cy="713232"/>
           </a:xfrm>
           <a:prstGeom prst="rect">
             <a:avLst/>
@@ -7659,13 +8052,13 @@
               </a:spcAft>
             </a:pPr>
             <a:r>
-              <a:rPr sz="1350" b="0">
-                <a:solidFill>
-                  <a:srgbClr val="FFB020"/>
+              <a:rPr sz="1900" b="0">
+                <a:solidFill>
+                  <a:srgbClr val="98A1B6"/>
                 </a:solidFill>
                 <a:latin typeface="Helvetica Neue"/>
               </a:rPr>
-              <a:t>·  /ws3 has NO per-flush completion event — only `chunk` and `done`. Pipeline the flushes and every chunk is attributed to segment 0. You must read each flush's `done` before sending the next. This one bit us in production.</a:t>
+              <a:t>·  Tables, not pictures. A photographed KFS is refused, not guessed at.</a:t>
             </a:r>
           </a:p>
         </p:txBody>
@@ -7678,8 +8071,8 @@
         </p:nvSpPr>
         <p:spPr>
           <a:xfrm>
-            <a:off x="731520" y="6126480"/>
-            <a:ext cx="10881360" cy="365760"/>
+            <a:off x="731520" y="5047488"/>
+            <a:ext cx="10881360" cy="713232"/>
           </a:xfrm>
           <a:prstGeom prst="rect">
             <a:avLst/>
@@ -7701,13 +8094,55 @@
               </a:spcAft>
             </a:pPr>
             <a:r>
-              <a:rPr sz="1100" b="0">
+              <a:rPr sz="1900" b="0">
                 <a:solidFill>
                   <a:srgbClr val="98A1B6"/>
                 </a:solidFill>
-                <a:latin typeface="Menlo"/>
-              </a:rPr>
-              <a:t>Config: coda / taru / hi · mulaw 8000 · segment=never + explicit flush · timeScaleFactor 1.0, speedAlpha never sent</a:t>
+                <a:latin typeface="Helvetica Neue"/>
+              </a:rPr>
+              <a:t>·  No authentication. A call link is a bearer capability.</a:t>
+            </a:r>
+          </a:p>
+        </p:txBody>
+      </p:sp>
+      <p:sp>
+        <p:nvSpPr>
+          <p:cNvPr id="10" name="TextBox 9"/>
+          <p:cNvSpPr txBox="1"/>
+          <p:nvPr/>
+        </p:nvSpPr>
+        <p:spPr>
+          <a:xfrm>
+            <a:off x="731520" y="5760720"/>
+            <a:ext cx="10881360" cy="713232"/>
+          </a:xfrm>
+          <a:prstGeom prst="rect">
+            <a:avLst/>
+          </a:prstGeom>
+          <a:noFill/>
+        </p:spPr>
+        <p:txBody>
+          <a:bodyPr wrap="square" lIns="0" rIns="0" tIns="0" bIns="0">
+            <a:spAutoFit/>
+          </a:bodyPr>
+          <a:lstStyle/>
+          <a:p>
+            <a:pPr algn="l">
+              <a:lnSpc>
+                <a:spcPct val="125000"/>
+              </a:lnSpc>
+              <a:spcAft>
+                <a:spcPts val="600"/>
+              </a:spcAft>
+            </a:pPr>
+            <a:r>
+              <a:rPr sz="1900" b="0">
+                <a:solidFill>
+                  <a:srgbClr val="98A1B6"/>
+                </a:solidFill>
+                <a:latin typeface="Helvetica Neue"/>
+              </a:rPr>
+              <a:t>·  The human listening panel has not been run.</a:t>
             </a:r>
           </a:p>
         </p:txBody>
